--- a/전기차보조금_NextJS_발표.pptx
+++ b/전기차보조금_NextJS_발표.pptx
@@ -504,7 +504,7 @@
           <a:p>
             <a:r>
               <a:rPr lang="en-US" dirty="0"/>
-              <a:t>핵심 메시지: Streamlit은 서버 재실행 모델이라 매 상호작용이 느리고 커스텀 인터랙션이 어렵다. Next.js는 클라이언트 반응형이라 즉각적이고 부드러운, 실제 서비스 수준의 UX를 만들 수 있다.</a:t>
+              <a:t>Streamlit은 서버 재실행 모델이라 매 상호작용이 느리고 커스텀 인터랙션이 어렵다. Next.js는 클라이언트 반응형이라 즉각적이고 부드러운, 실제 서비스 수준의 UX를 만들 수 있다.</a:t>
             </a:r>
             <a:endParaRPr lang="en-US" dirty="0"/>
           </a:p>
@@ -1035,7 +1035,7 @@
     <p:bg>
       <p:bgPr>
         <a:solidFill>
-          <a:srgbClr val="0B0F17"/>
+          <a:srgbClr val="FFFFFF"/>
         </a:solidFill>
       </p:bgPr>
     </p:bg>
@@ -1061,34 +1061,34 @@
         </p:nvSpPr>
         <p:spPr>
           <a:xfrm>
-            <a:off x="640080" y="502920"/>
-            <a:ext cx="10058400" cy="365760"/>
-          </a:xfrm>
-          <a:prstGeom prst="rect">
-            <a:avLst/>
-          </a:prstGeom>
-          <a:noFill/>
-          <a:ln/>
-        </p:spPr>
-        <p:txBody>
-          <a:bodyPr wrap="square" lIns="0" tIns="0" rIns="0" bIns="0" rtlCol="0" anchor="ctr"/>
-          <a:lstStyle/>
-          <a:p>
-            <a:pPr indent="0" marL="0">
-              <a:buNone/>
-            </a:pPr>
-            <a:r>
-              <a:rPr lang="en-US" sz="1300" spc="200" kern="0" dirty="0">
-                <a:solidFill>
-                  <a:srgbClr val="9CA3AF"/>
-                </a:solidFill>
-                <a:latin typeface="Calibri" pitchFamily="34" charset="0"/>
-                <a:ea typeface="Calibri" pitchFamily="34" charset="-122"/>
-                <a:cs typeface="Calibri" pitchFamily="34" charset="-120"/>
-              </a:rPr>
-              <a:t>팀 16  ·  전기차 구매보조금 상담 AI</a:t>
-            </a:r>
-            <a:endParaRPr lang="en-US" sz="1300" dirty="0"/>
+            <a:off x="457200" y="365760"/>
+            <a:ext cx="11277295" cy="274320"/>
+          </a:xfrm>
+          <a:prstGeom prst="rect">
+            <a:avLst/>
+          </a:prstGeom>
+          <a:noFill/>
+          <a:ln/>
+        </p:spPr>
+        <p:txBody>
+          <a:bodyPr wrap="square" lIns="0" tIns="0" rIns="0" bIns="0" rtlCol="0" anchor="ctr"/>
+          <a:lstStyle/>
+          <a:p>
+            <a:pPr indent="0" marL="0">
+              <a:buNone/>
+            </a:pPr>
+            <a:r>
+              <a:rPr lang="en-US" sz="1200" b="1" spc="100" kern="0" dirty="0">
+                <a:solidFill>
+                  <a:srgbClr val="8E8E93"/>
+                </a:solidFill>
+                <a:latin typeface="Pretendard" pitchFamily="34" charset="0"/>
+                <a:ea typeface="Pretendard" pitchFamily="34" charset="-122"/>
+                <a:cs typeface="Pretendard" pitchFamily="34" charset="-120"/>
+              </a:rPr>
+              <a:t>01  기술 선택</a:t>
+            </a:r>
+            <a:endParaRPr lang="en-US" sz="1200" dirty="0"/>
           </a:p>
         </p:txBody>
       </p:sp>
@@ -1100,8 +1100,8 @@
         </p:nvSpPr>
         <p:spPr>
           <a:xfrm>
-            <a:off x="640080" y="1051560"/>
-            <a:ext cx="10972800" cy="1554480"/>
+            <a:off x="457200" y="914400"/>
+            <a:ext cx="11277295" cy="685800"/>
           </a:xfrm>
           <a:prstGeom prst="rect">
             <a:avLst/>
@@ -1115,128 +1115,172 @@
           <a:p>
             <a:pPr indent="0" marL="0">
               <a:lnSpc>
-                <a:spcPct val="100000"/>
+                <a:spcPct val="120000"/>
               </a:lnSpc>
               <a:buNone/>
             </a:pPr>
             <a:r>
-              <a:rPr lang="en-US" sz="4400" b="1" dirty="0">
-                <a:solidFill>
-                  <a:srgbClr val="FFFFFF"/>
-                </a:solidFill>
-                <a:latin typeface="Calibri" pitchFamily="34" charset="0"/>
-                <a:ea typeface="Calibri" pitchFamily="34" charset="-122"/>
-                <a:cs typeface="Calibri" pitchFamily="34" charset="-120"/>
-              </a:rPr>
-              <a:t>왜 Streamlit이 아니라
-</a:t>
-            </a:r>
+              <a:rPr lang="en-US" sz="3400" b="1" dirty="0">
+                <a:solidFill>
+                  <a:srgbClr val="222222"/>
+                </a:solidFill>
+                <a:latin typeface="Pretendard" pitchFamily="34" charset="0"/>
+                <a:ea typeface="Pretendard" pitchFamily="34" charset="-122"/>
+                <a:cs typeface="Pretendard" pitchFamily="34" charset="-120"/>
+              </a:rPr>
+              <a:t>왜 Streamlit이 아니라 Next.js인가?</a:t>
+            </a:r>
+            <a:endParaRPr lang="en-US" sz="3400" dirty="0"/>
+          </a:p>
+        </p:txBody>
+      </p:sp>
+      <p:sp>
+        <p:nvSpPr>
+          <p:cNvPr id="4" name="Text 2"/>
+          <p:cNvSpPr/>
+          <p:nvPr/>
+        </p:nvSpPr>
+        <p:spPr>
+          <a:xfrm>
+            <a:off x="457200" y="1490472"/>
+            <a:ext cx="11277295" cy="457200"/>
+          </a:xfrm>
+          <a:prstGeom prst="rect">
+            <a:avLst/>
+          </a:prstGeom>
+          <a:noFill/>
+          <a:ln/>
+        </p:spPr>
+        <p:txBody>
+          <a:bodyPr wrap="square" lIns="0" tIns="0" rIns="0" bIns="0" rtlCol="0" anchor="ctr"/>
+          <a:lstStyle/>
+          <a:p>
             <a:pPr indent="0" marL="0">
               <a:lnSpc>
-                <a:spcPct val="100000"/>
+                <a:spcPct val="145000"/>
               </a:lnSpc>
               <a:buNone/>
             </a:pPr>
             <a:r>
-              <a:rPr lang="en-US" sz="4400" b="1" dirty="0">
-                <a:solidFill>
-                  <a:srgbClr val="34D399"/>
-                </a:solidFill>
-                <a:latin typeface="Calibri" pitchFamily="34" charset="0"/>
-                <a:ea typeface="Calibri" pitchFamily="34" charset="-122"/>
-                <a:cs typeface="Calibri" pitchFamily="34" charset="-120"/>
-              </a:rPr>
-              <a:t>Next.js</a:t>
-            </a:r>
-            <a:pPr indent="0" marL="0">
-              <a:lnSpc>
-                <a:spcPct val="100000"/>
-              </a:lnSpc>
-              <a:buNone/>
-            </a:pPr>
-            <a:r>
-              <a:rPr lang="en-US" sz="4400" b="1" dirty="0">
-                <a:solidFill>
-                  <a:srgbClr val="FFFFFF"/>
-                </a:solidFill>
-                <a:latin typeface="Calibri" pitchFamily="34" charset="0"/>
-                <a:ea typeface="Calibri" pitchFamily="34" charset="-122"/>
-                <a:cs typeface="Calibri" pitchFamily="34" charset="-120"/>
-              </a:rPr>
-              <a:t> 인가?</a:t>
-            </a:r>
-            <a:endParaRPr lang="en-US" sz="4400" dirty="0"/>
-          </a:p>
-        </p:txBody>
-      </p:sp>
-      <p:sp>
-        <p:nvSpPr>
-          <p:cNvPr id="4" name="Text 2"/>
-          <p:cNvSpPr/>
-          <p:nvPr/>
-        </p:nvSpPr>
-        <p:spPr>
-          <a:xfrm>
-            <a:off x="658368" y="2743200"/>
-            <a:ext cx="10972800" cy="457200"/>
-          </a:xfrm>
-          <a:prstGeom prst="rect">
-            <a:avLst/>
-          </a:prstGeom>
-          <a:noFill/>
-          <a:ln/>
-        </p:spPr>
-        <p:txBody>
-          <a:bodyPr wrap="square" lIns="0" tIns="0" rIns="0" bIns="0" rtlCol="0" anchor="ctr"/>
-          <a:lstStyle/>
-          <a:p>
-            <a:pPr indent="0" marL="0">
-              <a:buNone/>
-            </a:pPr>
-            <a:r>
-              <a:rPr lang="en-US" sz="1800" i="1" dirty="0">
-                <a:solidFill>
-                  <a:srgbClr val="34D399"/>
-                </a:solidFill>
-                <a:latin typeface="Calibri" pitchFamily="34" charset="0"/>
-                <a:ea typeface="Calibri" pitchFamily="34" charset="-122"/>
-                <a:cs typeface="Calibri" pitchFamily="34" charset="-120"/>
+              <a:rPr lang="en-US" sz="1600" dirty="0">
+                <a:solidFill>
+                  <a:srgbClr val="45515E"/>
+                </a:solidFill>
+                <a:latin typeface="Pretendard" pitchFamily="34" charset="0"/>
+                <a:ea typeface="Pretendard" pitchFamily="34" charset="-122"/>
+                <a:cs typeface="Pretendard" pitchFamily="34" charset="-120"/>
               </a:rPr>
               <a:t>데이터를 '보여주는 도구'가 아니라, 사용자가 '탐색하는 제품'을 만들었습니다.</a:t>
             </a:r>
-            <a:endParaRPr lang="en-US" sz="1800" dirty="0"/>
-          </a:p>
-        </p:txBody>
-      </p:sp>
-      <p:sp>
-        <p:nvSpPr>
-          <p:cNvPr id="5" name="Shape 3"/>
-          <p:cNvSpPr/>
-          <p:nvPr/>
-        </p:nvSpPr>
-        <p:spPr>
-          <a:xfrm>
-            <a:off x="640080" y="3611880"/>
-            <a:ext cx="5074920" cy="2514600"/>
-          </a:xfrm>
-          <a:prstGeom prst="roundRect">
-            <a:avLst>
-              <a:gd name="adj" fmla="val 4364"/>
-            </a:avLst>
-          </a:prstGeom>
-          <a:solidFill>
-            <a:srgbClr val="161D29"/>
+            <a:endParaRPr lang="en-US" sz="1600" dirty="0"/>
+          </a:p>
+        </p:txBody>
+      </p:sp>
+      <p:sp>
+        <p:nvSpPr>
+          <p:cNvPr id="5" name="Text 3"/>
+          <p:cNvSpPr/>
+          <p:nvPr/>
+        </p:nvSpPr>
+        <p:spPr>
+          <a:xfrm>
+            <a:off x="457200" y="6446520"/>
+            <a:ext cx="2743200" cy="228600"/>
+          </a:xfrm>
+          <a:prstGeom prst="rect">
+            <a:avLst/>
+          </a:prstGeom>
+          <a:noFill/>
+          <a:ln/>
+        </p:spPr>
+        <p:txBody>
+          <a:bodyPr wrap="square" lIns="0" tIns="0" rIns="0" bIns="0" rtlCol="0" anchor="ctr"/>
+          <a:lstStyle/>
+          <a:p>
+            <a:pPr indent="0" marL="0">
+              <a:buNone/>
+            </a:pPr>
+            <a:r>
+              <a:rPr lang="en-US" sz="1000" dirty="0">
+                <a:solidFill>
+                  <a:srgbClr val="8E8E93"/>
+                </a:solidFill>
+                <a:latin typeface="Pretendard" pitchFamily="34" charset="0"/>
+                <a:ea typeface="Pretendard" pitchFamily="34" charset="-122"/>
+                <a:cs typeface="Pretendard" pitchFamily="34" charset="-120"/>
+              </a:rPr>
+              <a:t>1</a:t>
+            </a:r>
+            <a:endParaRPr lang="en-US" sz="1000" dirty="0"/>
+          </a:p>
+        </p:txBody>
+      </p:sp>
+      <p:sp>
+        <p:nvSpPr>
+          <p:cNvPr id="6" name="Text 4"/>
+          <p:cNvSpPr/>
+          <p:nvPr/>
+        </p:nvSpPr>
+        <p:spPr>
+          <a:xfrm>
+            <a:off x="5333695" y="6446520"/>
+            <a:ext cx="6400800" cy="228600"/>
+          </a:xfrm>
+          <a:prstGeom prst="rect">
+            <a:avLst/>
+          </a:prstGeom>
+          <a:noFill/>
+          <a:ln/>
+        </p:spPr>
+        <p:txBody>
+          <a:bodyPr wrap="square" lIns="0" tIns="0" rIns="0" bIns="0" rtlCol="0" anchor="ctr"/>
+          <a:lstStyle/>
+          <a:p>
+            <a:pPr algn="r" indent="0" marL="0">
+              <a:buNone/>
+            </a:pPr>
+            <a:r>
+              <a:rPr lang="en-US" sz="900" dirty="0">
+                <a:solidFill>
+                  <a:srgbClr val="8E8E93"/>
+                </a:solidFill>
+                <a:latin typeface="Pretendard" pitchFamily="34" charset="0"/>
+                <a:ea typeface="Pretendard" pitchFamily="34" charset="-122"/>
+                <a:cs typeface="Pretendard" pitchFamily="34" charset="-120"/>
+              </a:rPr>
+              <a:t>team-16-project · 2026 전기차 보조금 상담 AI</a:t>
+            </a:r>
+            <a:endParaRPr lang="en-US" sz="900" dirty="0"/>
+          </a:p>
+        </p:txBody>
+      </p:sp>
+      <p:sp>
+        <p:nvSpPr>
+          <p:cNvPr id="7" name="Shape 5"/>
+          <p:cNvSpPr/>
+          <p:nvPr/>
+        </p:nvSpPr>
+        <p:spPr>
+          <a:xfrm>
+            <a:off x="457200" y="2331720"/>
+            <a:ext cx="5257800" cy="2606040"/>
+          </a:xfrm>
+          <a:prstGeom prst="rect">
+            <a:avLst/>
+          </a:prstGeom>
+          <a:solidFill>
+            <a:srgbClr val="FFFFFF"/>
           </a:solidFill>
           <a:ln w="12700">
             <a:solidFill>
-              <a:srgbClr val="26303F"/>
+              <a:srgbClr val="E5E7EB"/>
             </a:solidFill>
             <a:prstDash val="solid"/>
           </a:ln>
           <a:effectLst>
-            <a:outerShdw sx="100000" sy="100000" kx="0" ky="0" algn="bl" rotWithShape="0" blurRad="127000" dist="50800" dir="5400000">
+            <a:outerShdw sx="100000" sy="100000" kx="0" ky="0" algn="bl" rotWithShape="0" blurRad="76200" dist="50800" dir="5400000">
               <a:srgbClr val="000000">
-                <a:alpha val="45000"/>
+                <a:alpha val="8000"/>
               </a:srgbClr>
             </a:outerShdw>
           </a:effectLst>
@@ -1244,106 +1288,112 @@
       </p:sp>
       <p:sp>
         <p:nvSpPr>
-          <p:cNvPr id="6" name="Text 4"/>
-          <p:cNvSpPr/>
-          <p:nvPr/>
-        </p:nvSpPr>
-        <p:spPr>
-          <a:xfrm>
-            <a:off x="868680" y="3813048"/>
-            <a:ext cx="4617720" cy="365760"/>
-          </a:xfrm>
-          <a:prstGeom prst="rect">
-            <a:avLst/>
-          </a:prstGeom>
-          <a:noFill/>
-          <a:ln/>
-        </p:spPr>
-        <p:txBody>
-          <a:bodyPr wrap="square" lIns="0" tIns="0" rIns="0" bIns="0" rtlCol="0" anchor="ctr"/>
-          <a:lstStyle/>
-          <a:p>
-            <a:pPr indent="0" marL="0">
-              <a:buNone/>
-            </a:pPr>
-            <a:r>
-              <a:rPr lang="en-US" sz="1700" b="1" dirty="0">
-                <a:solidFill>
-                  <a:srgbClr val="F87171"/>
-                </a:solidFill>
-                <a:latin typeface="Calibri" pitchFamily="34" charset="0"/>
-                <a:ea typeface="Calibri" pitchFamily="34" charset="-122"/>
-                <a:cs typeface="Calibri" pitchFamily="34" charset="-120"/>
+          <p:cNvPr id="8" name="Text 6"/>
+          <p:cNvSpPr/>
+          <p:nvPr/>
+        </p:nvSpPr>
+        <p:spPr>
+          <a:xfrm>
+            <a:off x="713232" y="2569464"/>
+            <a:ext cx="4745736" cy="365760"/>
+          </a:xfrm>
+          <a:prstGeom prst="rect">
+            <a:avLst/>
+          </a:prstGeom>
+          <a:noFill/>
+          <a:ln/>
+        </p:spPr>
+        <p:txBody>
+          <a:bodyPr wrap="square" lIns="0" tIns="0" rIns="0" bIns="0" rtlCol="0" anchor="ctr"/>
+          <a:lstStyle/>
+          <a:p>
+            <a:pPr indent="0" marL="0">
+              <a:buNone/>
+            </a:pPr>
+            <a:r>
+              <a:rPr lang="en-US" sz="1600" b="1" dirty="0">
+                <a:solidFill>
+                  <a:srgbClr val="8E8E93"/>
+                </a:solidFill>
+                <a:latin typeface="Pretendard" pitchFamily="34" charset="0"/>
+                <a:ea typeface="Pretendard" pitchFamily="34" charset="-122"/>
+                <a:cs typeface="Pretendard" pitchFamily="34" charset="-120"/>
               </a:rPr>
               <a:t>Streamlit  ·  다른 조</a:t>
             </a:r>
-            <a:endParaRPr lang="en-US" sz="1700" dirty="0"/>
-          </a:p>
-        </p:txBody>
-      </p:sp>
-      <p:sp>
-        <p:nvSpPr>
-          <p:cNvPr id="7" name="Text 5"/>
-          <p:cNvSpPr/>
-          <p:nvPr/>
-        </p:nvSpPr>
-        <p:spPr>
-          <a:xfrm>
-            <a:off x="868680" y="4325112"/>
-            <a:ext cx="4617720" cy="640080"/>
-          </a:xfrm>
-          <a:prstGeom prst="rect">
-            <a:avLst/>
-          </a:prstGeom>
-          <a:noFill/>
-          <a:ln/>
-        </p:spPr>
-        <p:txBody>
-          <a:bodyPr wrap="square" lIns="0" tIns="0" rIns="0" bIns="0" rtlCol="0" anchor="ctr"/>
-          <a:lstStyle/>
-          <a:p>
-            <a:pPr indent="0" marL="0">
-              <a:buNone/>
-            </a:pPr>
-            <a:r>
-              <a:rPr lang="en-US" sz="1450" dirty="0">
-                <a:solidFill>
-                  <a:srgbClr val="9CA3AF"/>
-                </a:solidFill>
-                <a:latin typeface="Calibri" pitchFamily="34" charset="0"/>
-                <a:ea typeface="Calibri" pitchFamily="34" charset="-122"/>
-                <a:cs typeface="Calibri" pitchFamily="34" charset="-120"/>
+            <a:endParaRPr lang="en-US" sz="1600" dirty="0"/>
+          </a:p>
+        </p:txBody>
+      </p:sp>
+      <p:sp>
+        <p:nvSpPr>
+          <p:cNvPr id="9" name="Text 7"/>
+          <p:cNvSpPr/>
+          <p:nvPr/>
+        </p:nvSpPr>
+        <p:spPr>
+          <a:xfrm>
+            <a:off x="713232" y="3108960"/>
+            <a:ext cx="4745736" cy="640080"/>
+          </a:xfrm>
+          <a:prstGeom prst="rect">
+            <a:avLst/>
+          </a:prstGeom>
+          <a:noFill/>
+          <a:ln/>
+        </p:spPr>
+        <p:txBody>
+          <a:bodyPr wrap="square" lIns="0" tIns="0" rIns="0" bIns="0" rtlCol="0" anchor="ctr"/>
+          <a:lstStyle/>
+          <a:p>
+            <a:pPr indent="0" marL="0">
+              <a:lnSpc>
+                <a:spcPct val="140000"/>
+              </a:lnSpc>
+              <a:buNone/>
+            </a:pPr>
+            <a:r>
+              <a:rPr lang="en-US" sz="1400" dirty="0">
+                <a:solidFill>
+                  <a:srgbClr val="45515E"/>
+                </a:solidFill>
+                <a:latin typeface="Pretendard" pitchFamily="34" charset="0"/>
+                <a:ea typeface="Pretendard" pitchFamily="34" charset="-122"/>
+                <a:cs typeface="Pretendard" pitchFamily="34" charset="-120"/>
               </a:rPr>
               <a:t>클릭 한 번에 </a:t>
             </a:r>
             <a:pPr indent="0" marL="0">
-              <a:buNone/>
-            </a:pPr>
-            <a:r>
-              <a:rPr lang="en-US" sz="1450" b="1" dirty="0">
-                <a:solidFill>
-                  <a:srgbClr val="FFFFFF"/>
-                </a:solidFill>
-                <a:latin typeface="Calibri" pitchFamily="34" charset="0"/>
-                <a:ea typeface="Calibri" pitchFamily="34" charset="-122"/>
-                <a:cs typeface="Calibri" pitchFamily="34" charset="-120"/>
+              <a:lnSpc>
+                <a:spcPct val="140000"/>
+              </a:lnSpc>
+              <a:buNone/>
+            </a:pPr>
+            <a:r>
+              <a:rPr lang="en-US" sz="1400" b="1" dirty="0">
+                <a:solidFill>
+                  <a:srgbClr val="222222"/>
+                </a:solidFill>
+                <a:latin typeface="Pretendard" pitchFamily="34" charset="0"/>
+                <a:ea typeface="Pretendard" pitchFamily="34" charset="-122"/>
+                <a:cs typeface="Pretendard" pitchFamily="34" charset="-120"/>
               </a:rPr>
               <a:t>서버가 스크립트 전체를 재실행</a:t>
             </a:r>
-            <a:endParaRPr lang="en-US" sz="1450" dirty="0"/>
-          </a:p>
-        </p:txBody>
-      </p:sp>
-      <p:sp>
-        <p:nvSpPr>
-          <p:cNvPr id="8" name="Text 6"/>
-          <p:cNvSpPr/>
-          <p:nvPr/>
-        </p:nvSpPr>
-        <p:spPr>
-          <a:xfrm>
-            <a:off x="868680" y="5029200"/>
-            <a:ext cx="4617720" cy="914400"/>
+            <a:endParaRPr lang="en-US" sz="1400" dirty="0"/>
+          </a:p>
+        </p:txBody>
+      </p:sp>
+      <p:sp>
+        <p:nvSpPr>
+          <p:cNvPr id="10" name="Text 8"/>
+          <p:cNvSpPr/>
+          <p:nvPr/>
+        </p:nvSpPr>
+        <p:spPr>
+          <a:xfrm>
+            <a:off x="713232" y="3794760"/>
+            <a:ext cx="4745736" cy="914400"/>
           </a:xfrm>
           <a:prstGeom prst="rect">
             <a:avLst/>
@@ -1357,74 +1407,72 @@
           <a:p>
             <a:pPr indent="0" marL="0">
               <a:lnSpc>
-                <a:spcPct val="120000"/>
+                <a:spcPct val="145000"/>
               </a:lnSpc>
               <a:buNone/>
             </a:pPr>
             <a:r>
-              <a:rPr lang="en-US" sz="1350" dirty="0">
-                <a:solidFill>
-                  <a:srgbClr val="9CA3AF"/>
-                </a:solidFill>
-                <a:latin typeface="Calibri" pitchFamily="34" charset="0"/>
-                <a:ea typeface="Calibri" pitchFamily="34" charset="-122"/>
-                <a:cs typeface="Calibri" pitchFamily="34" charset="-120"/>
+              <a:rPr lang="en-US" sz="1300" dirty="0">
+                <a:solidFill>
+                  <a:srgbClr val="45515E"/>
+                </a:solidFill>
+                <a:latin typeface="Pretendard" pitchFamily="34" charset="0"/>
+                <a:ea typeface="Pretendard" pitchFamily="34" charset="-122"/>
+                <a:cs typeface="Pretendard" pitchFamily="34" charset="-120"/>
               </a:rPr>
               <a:t>→ 반응이 느리고 화면이 끊김</a:t>
             </a:r>
-            <a:endParaRPr lang="en-US" sz="1350" dirty="0"/>
+            <a:endParaRPr lang="en-US" sz="1300" dirty="0"/>
           </a:p>
           <a:p>
             <a:pPr indent="0" marL="0">
               <a:lnSpc>
-                <a:spcPct val="120000"/>
+                <a:spcPct val="145000"/>
               </a:lnSpc>
               <a:buNone/>
             </a:pPr>
             <a:r>
-              <a:rPr lang="en-US" sz="1350" dirty="0">
-                <a:solidFill>
-                  <a:srgbClr val="9CA3AF"/>
-                </a:solidFill>
-                <a:latin typeface="Calibri" pitchFamily="34" charset="0"/>
-                <a:ea typeface="Calibri" pitchFamily="34" charset="-122"/>
-                <a:cs typeface="Calibri" pitchFamily="34" charset="-120"/>
+              <a:rPr lang="en-US" sz="1300" dirty="0">
+                <a:solidFill>
+                  <a:srgbClr val="45515E"/>
+                </a:solidFill>
+                <a:latin typeface="Pretendard" pitchFamily="34" charset="0"/>
+                <a:ea typeface="Pretendard" pitchFamily="34" charset="-122"/>
+                <a:cs typeface="Pretendard" pitchFamily="34" charset="-120"/>
               </a:rPr>
               <a:t>→ 커스텀 인터랙션·3D·음성 구현이 사실상 불가</a:t>
             </a:r>
-            <a:endParaRPr lang="en-US" sz="1350" dirty="0"/>
-          </a:p>
-        </p:txBody>
-      </p:sp>
-      <p:sp>
-        <p:nvSpPr>
-          <p:cNvPr id="9" name="Shape 7"/>
-          <p:cNvSpPr/>
-          <p:nvPr/>
-        </p:nvSpPr>
-        <p:spPr>
-          <a:xfrm>
-            <a:off x="6473952" y="3611880"/>
-            <a:ext cx="5074920" cy="2514600"/>
-          </a:xfrm>
-          <a:prstGeom prst="roundRect">
-            <a:avLst>
-              <a:gd name="adj" fmla="val 4364"/>
-            </a:avLst>
-          </a:prstGeom>
-          <a:solidFill>
-            <a:srgbClr val="112A22"/>
-          </a:solidFill>
-          <a:ln w="15875">
+            <a:endParaRPr lang="en-US" sz="1300" dirty="0"/>
+          </a:p>
+        </p:txBody>
+      </p:sp>
+      <p:sp>
+        <p:nvSpPr>
+          <p:cNvPr id="11" name="Shape 9"/>
+          <p:cNvSpPr/>
+          <p:nvPr/>
+        </p:nvSpPr>
+        <p:spPr>
+          <a:xfrm>
+            <a:off x="6476695" y="2331720"/>
+            <a:ext cx="5257800" cy="2606040"/>
+          </a:xfrm>
+          <a:prstGeom prst="rect">
+            <a:avLst/>
+          </a:prstGeom>
+          <a:solidFill>
+            <a:srgbClr val="FFFFFF"/>
+          </a:solidFill>
+          <a:ln w="19050">
             <a:solidFill>
-              <a:srgbClr val="10B981"/>
+              <a:srgbClr val="1456F0"/>
             </a:solidFill>
             <a:prstDash val="solid"/>
           </a:ln>
           <a:effectLst>
-            <a:outerShdw sx="100000" sy="100000" kx="0" ky="0" algn="bl" rotWithShape="0" blurRad="127000" dist="50800" dir="5400000">
+            <a:outerShdw sx="100000" sy="100000" kx="0" ky="0" algn="bl" rotWithShape="0" blurRad="76200" dist="50800" dir="5400000">
               <a:srgbClr val="000000">
-                <a:alpha val="45000"/>
+                <a:alpha val="8000"/>
               </a:srgbClr>
             </a:outerShdw>
           </a:effectLst>
@@ -1432,106 +1480,253 @@
       </p:sp>
       <p:sp>
         <p:nvSpPr>
-          <p:cNvPr id="10" name="Text 8"/>
-          <p:cNvSpPr/>
-          <p:nvPr/>
-        </p:nvSpPr>
-        <p:spPr>
-          <a:xfrm>
-            <a:off x="6702552" y="3813048"/>
-            <a:ext cx="4617720" cy="365760"/>
-          </a:xfrm>
-          <a:prstGeom prst="rect">
-            <a:avLst/>
-          </a:prstGeom>
-          <a:noFill/>
-          <a:ln/>
-        </p:spPr>
-        <p:txBody>
-          <a:bodyPr wrap="square" lIns="0" tIns="0" rIns="0" bIns="0" rtlCol="0" anchor="ctr"/>
-          <a:lstStyle/>
-          <a:p>
-            <a:pPr indent="0" marL="0">
-              <a:buNone/>
-            </a:pPr>
-            <a:r>
-              <a:rPr lang="en-US" sz="1700" b="1" dirty="0">
-                <a:solidFill>
-                  <a:srgbClr val="34D399"/>
-                </a:solidFill>
-                <a:latin typeface="Calibri" pitchFamily="34" charset="0"/>
-                <a:ea typeface="Calibri" pitchFamily="34" charset="-122"/>
-                <a:cs typeface="Calibri" pitchFamily="34" charset="-120"/>
+          <p:cNvPr id="12" name="Text 10"/>
+          <p:cNvSpPr/>
+          <p:nvPr/>
+        </p:nvSpPr>
+        <p:spPr>
+          <a:xfrm>
+            <a:off x="6732727" y="2569464"/>
+            <a:ext cx="4745736" cy="365760"/>
+          </a:xfrm>
+          <a:prstGeom prst="rect">
+            <a:avLst/>
+          </a:prstGeom>
+          <a:noFill/>
+          <a:ln/>
+        </p:spPr>
+        <p:txBody>
+          <a:bodyPr wrap="square" lIns="0" tIns="0" rIns="0" bIns="0" rtlCol="0" anchor="ctr"/>
+          <a:lstStyle/>
+          <a:p>
+            <a:pPr indent="0" marL="0">
+              <a:buNone/>
+            </a:pPr>
+            <a:r>
+              <a:rPr lang="en-US" sz="1600" b="1" dirty="0">
+                <a:solidFill>
+                  <a:srgbClr val="1456F0"/>
+                </a:solidFill>
+                <a:latin typeface="Pretendard" pitchFamily="34" charset="0"/>
+                <a:ea typeface="Pretendard" pitchFamily="34" charset="-122"/>
+                <a:cs typeface="Pretendard" pitchFamily="34" charset="-120"/>
               </a:rPr>
               <a:t>Next.js  ·  우리 팀</a:t>
             </a:r>
-            <a:endParaRPr lang="en-US" sz="1700" dirty="0"/>
-          </a:p>
-        </p:txBody>
-      </p:sp>
-      <p:sp>
-        <p:nvSpPr>
-          <p:cNvPr id="11" name="Text 9"/>
-          <p:cNvSpPr/>
-          <p:nvPr/>
-        </p:nvSpPr>
-        <p:spPr>
-          <a:xfrm>
-            <a:off x="6702552" y="4325112"/>
-            <a:ext cx="4617720" cy="640080"/>
-          </a:xfrm>
-          <a:prstGeom prst="rect">
-            <a:avLst/>
-          </a:prstGeom>
-          <a:noFill/>
-          <a:ln/>
-        </p:spPr>
-        <p:txBody>
-          <a:bodyPr wrap="square" lIns="0" tIns="0" rIns="0" bIns="0" rtlCol="0" anchor="ctr"/>
-          <a:lstStyle/>
-          <a:p>
-            <a:pPr indent="0" marL="0">
-              <a:buNone/>
-            </a:pPr>
-            <a:r>
-              <a:rPr lang="en-US" sz="1450" dirty="0">
-                <a:solidFill>
-                  <a:srgbClr val="9CA3AF"/>
-                </a:solidFill>
-                <a:latin typeface="Calibri" pitchFamily="34" charset="0"/>
-                <a:ea typeface="Calibri" pitchFamily="34" charset="-122"/>
-                <a:cs typeface="Calibri" pitchFamily="34" charset="-120"/>
+            <a:endParaRPr lang="en-US" sz="1600" dirty="0"/>
+          </a:p>
+        </p:txBody>
+      </p:sp>
+      <p:sp>
+        <p:nvSpPr>
+          <p:cNvPr id="13" name="Text 11"/>
+          <p:cNvSpPr/>
+          <p:nvPr/>
+        </p:nvSpPr>
+        <p:spPr>
+          <a:xfrm>
+            <a:off x="6732727" y="3108960"/>
+            <a:ext cx="4745736" cy="640080"/>
+          </a:xfrm>
+          <a:prstGeom prst="rect">
+            <a:avLst/>
+          </a:prstGeom>
+          <a:noFill/>
+          <a:ln/>
+        </p:spPr>
+        <p:txBody>
+          <a:bodyPr wrap="square" lIns="0" tIns="0" rIns="0" bIns="0" rtlCol="0" anchor="ctr"/>
+          <a:lstStyle/>
+          <a:p>
+            <a:pPr indent="0" marL="0">
+              <a:lnSpc>
+                <a:spcPct val="140000"/>
+              </a:lnSpc>
+              <a:buNone/>
+            </a:pPr>
+            <a:r>
+              <a:rPr lang="en-US" sz="1400" dirty="0">
+                <a:solidFill>
+                  <a:srgbClr val="45515E"/>
+                </a:solidFill>
+                <a:latin typeface="Pretendard" pitchFamily="34" charset="0"/>
+                <a:ea typeface="Pretendard" pitchFamily="34" charset="-122"/>
+                <a:cs typeface="Pretendard" pitchFamily="34" charset="-120"/>
               </a:rPr>
               <a:t>바뀐 컴포넌트만 </a:t>
             </a:r>
             <a:pPr indent="0" marL="0">
-              <a:buNone/>
-            </a:pPr>
-            <a:r>
-              <a:rPr lang="en-US" sz="1450" b="1" dirty="0">
+              <a:lnSpc>
+                <a:spcPct val="140000"/>
+              </a:lnSpc>
+              <a:buNone/>
+            </a:pPr>
+            <a:r>
+              <a:rPr lang="en-US" sz="1400" b="1" dirty="0">
+                <a:solidFill>
+                  <a:srgbClr val="222222"/>
+                </a:solidFill>
+                <a:latin typeface="Pretendard" pitchFamily="34" charset="0"/>
+                <a:ea typeface="Pretendard" pitchFamily="34" charset="-122"/>
+                <a:cs typeface="Pretendard" pitchFamily="34" charset="-120"/>
+              </a:rPr>
+              <a:t>브라우저에서 즉시 렌더</a:t>
+            </a:r>
+            <a:endParaRPr lang="en-US" sz="1400" dirty="0"/>
+          </a:p>
+        </p:txBody>
+      </p:sp>
+      <p:sp>
+        <p:nvSpPr>
+          <p:cNvPr id="14" name="Text 12"/>
+          <p:cNvSpPr/>
+          <p:nvPr/>
+        </p:nvSpPr>
+        <p:spPr>
+          <a:xfrm>
+            <a:off x="6732727" y="3794760"/>
+            <a:ext cx="4745736" cy="914400"/>
+          </a:xfrm>
+          <a:prstGeom prst="rect">
+            <a:avLst/>
+          </a:prstGeom>
+          <a:noFill/>
+          <a:ln/>
+        </p:spPr>
+        <p:txBody>
+          <a:bodyPr wrap="square" lIns="0" tIns="0" rIns="0" bIns="0" rtlCol="0" anchor="ctr"/>
+          <a:lstStyle/>
+          <a:p>
+            <a:pPr indent="0" marL="0">
+              <a:lnSpc>
+                <a:spcPct val="145000"/>
+              </a:lnSpc>
+              <a:buNone/>
+            </a:pPr>
+            <a:r>
+              <a:rPr lang="en-US" sz="1300" dirty="0">
+                <a:solidFill>
+                  <a:srgbClr val="222222"/>
+                </a:solidFill>
+                <a:latin typeface="Pretendard" pitchFamily="34" charset="0"/>
+                <a:ea typeface="Pretendard" pitchFamily="34" charset="-122"/>
+                <a:cs typeface="Pretendard" pitchFamily="34" charset="-120"/>
+              </a:rPr>
+              <a:t>→ 즉각 반응·부드러운 인터랙션</a:t>
+            </a:r>
+            <a:endParaRPr lang="en-US" sz="1300" dirty="0"/>
+          </a:p>
+          <a:p>
+            <a:pPr indent="0" marL="0">
+              <a:lnSpc>
+                <a:spcPct val="145000"/>
+              </a:lnSpc>
+              <a:buNone/>
+            </a:pPr>
+            <a:r>
+              <a:rPr lang="en-US" sz="1300" dirty="0">
+                <a:solidFill>
+                  <a:srgbClr val="222222"/>
+                </a:solidFill>
+                <a:latin typeface="Pretendard" pitchFamily="34" charset="0"/>
+                <a:ea typeface="Pretendard" pitchFamily="34" charset="-122"/>
+                <a:cs typeface="Pretendard" pitchFamily="34" charset="-120"/>
+              </a:rPr>
+              <a:t>→ 실제 서비스 수준의 UX와 확장성</a:t>
+            </a:r>
+            <a:endParaRPr lang="en-US" sz="1300" dirty="0"/>
+          </a:p>
+        </p:txBody>
+      </p:sp>
+      <p:sp>
+        <p:nvSpPr>
+          <p:cNvPr id="15" name="Shape 13"/>
+          <p:cNvSpPr/>
+          <p:nvPr/>
+        </p:nvSpPr>
+        <p:spPr>
+          <a:xfrm>
+            <a:off x="5797296" y="3342132"/>
+            <a:ext cx="594360" cy="594360"/>
+          </a:xfrm>
+          <a:prstGeom prst="rect">
+            <a:avLst/>
+          </a:prstGeom>
+          <a:solidFill>
+            <a:srgbClr val="222222"/>
+          </a:solidFill>
+          <a:ln/>
+        </p:spPr>
+      </p:sp>
+      <p:sp>
+        <p:nvSpPr>
+          <p:cNvPr id="16" name="Text 14"/>
+          <p:cNvSpPr/>
+          <p:nvPr/>
+        </p:nvSpPr>
+        <p:spPr>
+          <a:xfrm>
+            <a:off x="5797296" y="3342132"/>
+            <a:ext cx="594360" cy="594360"/>
+          </a:xfrm>
+          <a:prstGeom prst="rect">
+            <a:avLst/>
+          </a:prstGeom>
+          <a:noFill/>
+          <a:ln/>
+        </p:spPr>
+        <p:txBody>
+          <a:bodyPr wrap="square" lIns="0" tIns="0" rIns="0" bIns="0" rtlCol="0" anchor="ctr"/>
+          <a:lstStyle/>
+          <a:p>
+            <a:pPr algn="ctr" indent="0" marL="0">
+              <a:buNone/>
+            </a:pPr>
+            <a:r>
+              <a:rPr lang="en-US" sz="1400" b="1" dirty="0">
                 <a:solidFill>
                   <a:srgbClr val="FFFFFF"/>
                 </a:solidFill>
-                <a:latin typeface="Calibri" pitchFamily="34" charset="0"/>
-                <a:ea typeface="Calibri" pitchFamily="34" charset="-122"/>
-                <a:cs typeface="Calibri" pitchFamily="34" charset="-120"/>
-              </a:rPr>
-              <a:t>브라우저에서 즉시 렌더</a:t>
-            </a:r>
-            <a:endParaRPr lang="en-US" sz="1450" dirty="0"/>
-          </a:p>
-        </p:txBody>
-      </p:sp>
-      <p:sp>
-        <p:nvSpPr>
-          <p:cNvPr id="12" name="Text 10"/>
-          <p:cNvSpPr/>
-          <p:nvPr/>
-        </p:nvSpPr>
-        <p:spPr>
-          <a:xfrm>
-            <a:off x="6702552" y="5029200"/>
-            <a:ext cx="4617720" cy="914400"/>
+                <a:latin typeface="Pretendard" pitchFamily="34" charset="0"/>
+                <a:ea typeface="Pretendard" pitchFamily="34" charset="-122"/>
+                <a:cs typeface="Pretendard" pitchFamily="34" charset="-120"/>
+              </a:rPr>
+              <a:t>VS</a:t>
+            </a:r>
+            <a:endParaRPr lang="en-US" sz="1400" dirty="0"/>
+          </a:p>
+        </p:txBody>
+      </p:sp>
+      <p:sp>
+        <p:nvSpPr>
+          <p:cNvPr id="17" name="Shape 15"/>
+          <p:cNvSpPr/>
+          <p:nvPr/>
+        </p:nvSpPr>
+        <p:spPr>
+          <a:xfrm>
+            <a:off x="457200" y="5166360"/>
+            <a:ext cx="11277295" cy="868680"/>
+          </a:xfrm>
+          <a:prstGeom prst="rect">
+            <a:avLst/>
+          </a:prstGeom>
+          <a:solidFill>
+            <a:srgbClr val="F2F3F5"/>
+          </a:solidFill>
+          <a:ln/>
+        </p:spPr>
+      </p:sp>
+      <p:sp>
+        <p:nvSpPr>
+          <p:cNvPr id="18" name="Text 16"/>
+          <p:cNvSpPr/>
+          <p:nvPr/>
+        </p:nvSpPr>
+        <p:spPr>
+          <a:xfrm>
+            <a:off x="731520" y="5166360"/>
+            <a:ext cx="10728655" cy="868680"/>
           </a:xfrm>
           <a:prstGeom prst="rect">
             <a:avLst/>
@@ -1545,106 +1740,39 @@
           <a:p>
             <a:pPr indent="0" marL="0">
               <a:lnSpc>
-                <a:spcPct val="120000"/>
+                <a:spcPct val="130000"/>
               </a:lnSpc>
               <a:buNone/>
             </a:pPr>
             <a:r>
-              <a:rPr lang="en-US" sz="1350" dirty="0">
-                <a:solidFill>
-                  <a:srgbClr val="A7F3D0"/>
-                </a:solidFill>
-                <a:latin typeface="Calibri" pitchFamily="34" charset="0"/>
-                <a:ea typeface="Calibri" pitchFamily="34" charset="-122"/>
-                <a:cs typeface="Calibri" pitchFamily="34" charset="-120"/>
-              </a:rPr>
-              <a:t>→ 즉각 반응·부드러운 인터랙션</a:t>
-            </a:r>
-            <a:endParaRPr lang="en-US" sz="1350" dirty="0"/>
-          </a:p>
-          <a:p>
+              <a:rPr lang="en-US" sz="1400" b="1" dirty="0">
+                <a:solidFill>
+                  <a:srgbClr val="1456F0"/>
+                </a:solidFill>
+                <a:latin typeface="Pretendard" pitchFamily="34" charset="0"/>
+                <a:ea typeface="Pretendard" pitchFamily="34" charset="-122"/>
+                <a:cs typeface="Pretendard" pitchFamily="34" charset="-120"/>
+              </a:rPr>
+              <a:t>핵심  </a:t>
+            </a:r>
             <a:pPr indent="0" marL="0">
               <a:lnSpc>
-                <a:spcPct val="120000"/>
+                <a:spcPct val="130000"/>
               </a:lnSpc>
               <a:buNone/>
             </a:pPr>
             <a:r>
-              <a:rPr lang="en-US" sz="1350" dirty="0">
-                <a:solidFill>
-                  <a:srgbClr val="A7F3D0"/>
-                </a:solidFill>
-                <a:latin typeface="Calibri" pitchFamily="34" charset="0"/>
-                <a:ea typeface="Calibri" pitchFamily="34" charset="-122"/>
-                <a:cs typeface="Calibri" pitchFamily="34" charset="-120"/>
-              </a:rPr>
-              <a:t>→ 실제 서비스 수준의 UX와 확장성</a:t>
-            </a:r>
-            <a:endParaRPr lang="en-US" sz="1350" dirty="0"/>
-          </a:p>
-        </p:txBody>
-      </p:sp>
-      <p:sp>
-        <p:nvSpPr>
-          <p:cNvPr id="13" name="Shape 11"/>
-          <p:cNvSpPr/>
-          <p:nvPr/>
-        </p:nvSpPr>
-        <p:spPr>
-          <a:xfrm>
-            <a:off x="5742432" y="4503420"/>
-            <a:ext cx="731520" cy="731520"/>
-          </a:xfrm>
-          <a:prstGeom prst="ellipse">
-            <a:avLst/>
-          </a:prstGeom>
-          <a:solidFill>
-            <a:srgbClr val="10B981"/>
-          </a:solidFill>
-          <a:ln w="38100">
-            <a:solidFill>
-              <a:srgbClr val="0B0F17"/>
-            </a:solidFill>
-            <a:prstDash val="solid"/>
-          </a:ln>
-        </p:spPr>
-      </p:sp>
-      <p:sp>
-        <p:nvSpPr>
-          <p:cNvPr id="14" name="Text 12"/>
-          <p:cNvSpPr/>
-          <p:nvPr/>
-        </p:nvSpPr>
-        <p:spPr>
-          <a:xfrm>
-            <a:off x="5742432" y="4503420"/>
-            <a:ext cx="731520" cy="731520"/>
-          </a:xfrm>
-          <a:prstGeom prst="rect">
-            <a:avLst/>
-          </a:prstGeom>
-          <a:noFill/>
-          <a:ln/>
-        </p:spPr>
-        <p:txBody>
-          <a:bodyPr wrap="square" lIns="0" tIns="0" rIns="0" bIns="0" rtlCol="0" anchor="ctr"/>
-          <a:lstStyle/>
-          <a:p>
-            <a:pPr algn="ctr" indent="0" marL="0">
-              <a:buNone/>
-            </a:pPr>
-            <a:r>
-              <a:rPr lang="en-US" sz="1500" b="1" dirty="0">
-                <a:solidFill>
-                  <a:srgbClr val="062017"/>
-                </a:solidFill>
-                <a:latin typeface="Calibri" pitchFamily="34" charset="0"/>
-                <a:ea typeface="Calibri" pitchFamily="34" charset="-122"/>
-                <a:cs typeface="Calibri" pitchFamily="34" charset="-120"/>
-              </a:rPr>
-              <a:t>VS</a:t>
-            </a:r>
-            <a:endParaRPr lang="en-US" sz="1500" dirty="0"/>
+              <a:rPr lang="en-US" sz="1400" b="1" dirty="0">
+                <a:solidFill>
+                  <a:srgbClr val="222222"/>
+                </a:solidFill>
+                <a:latin typeface="Pretendard" pitchFamily="34" charset="0"/>
+                <a:ea typeface="Pretendard" pitchFamily="34" charset="-122"/>
+                <a:cs typeface="Pretendard" pitchFamily="34" charset="-120"/>
+              </a:rPr>
+              <a:t>Streamlit = 서버 재실행 모델 / Next.js = 클라이언트 반응형 — 즉각성과 UX의 차이가 여기서 갈립니다.</a:t>
+            </a:r>
+            <a:endParaRPr lang="en-US" sz="1400" dirty="0"/>
           </a:p>
         </p:txBody>
       </p:sp>
@@ -1662,7 +1790,7 @@
     <p:bg>
       <p:bgPr>
         <a:solidFill>
-          <a:srgbClr val="0B0F17"/>
+          <a:srgbClr val="FFFFFF"/>
         </a:solidFill>
       </p:bgPr>
     </p:bg>
@@ -1688,105 +1816,226 @@
         </p:nvSpPr>
         <p:spPr>
           <a:xfrm>
-            <a:off x="640080" y="502920"/>
-            <a:ext cx="10972800" cy="640080"/>
-          </a:xfrm>
-          <a:prstGeom prst="rect">
-            <a:avLst/>
-          </a:prstGeom>
-          <a:noFill/>
-          <a:ln/>
-        </p:spPr>
-        <p:txBody>
-          <a:bodyPr wrap="square" lIns="0" tIns="0" rIns="0" bIns="0" rtlCol="0" anchor="ctr"/>
-          <a:lstStyle/>
-          <a:p>
-            <a:pPr indent="0" marL="0">
-              <a:buNone/>
-            </a:pPr>
-            <a:r>
-              <a:rPr lang="en-US" sz="3200" b="1" dirty="0">
-                <a:solidFill>
-                  <a:srgbClr val="FFFFFF"/>
-                </a:solidFill>
-                <a:latin typeface="Calibri" pitchFamily="34" charset="0"/>
-                <a:ea typeface="Calibri" pitchFamily="34" charset="-122"/>
-                <a:cs typeface="Calibri" pitchFamily="34" charset="-120"/>
+            <a:off x="457200" y="365760"/>
+            <a:ext cx="11277295" cy="274320"/>
+          </a:xfrm>
+          <a:prstGeom prst="rect">
+            <a:avLst/>
+          </a:prstGeom>
+          <a:noFill/>
+          <a:ln/>
+        </p:spPr>
+        <p:txBody>
+          <a:bodyPr wrap="square" lIns="0" tIns="0" rIns="0" bIns="0" rtlCol="0" anchor="ctr"/>
+          <a:lstStyle/>
+          <a:p>
+            <a:pPr indent="0" marL="0">
+              <a:buNone/>
+            </a:pPr>
+            <a:r>
+              <a:rPr lang="en-US" sz="1200" b="1" spc="100" kern="0" dirty="0">
+                <a:solidFill>
+                  <a:srgbClr val="8E8E93"/>
+                </a:solidFill>
+                <a:latin typeface="Pretendard" pitchFamily="34" charset="0"/>
+                <a:ea typeface="Pretendard" pitchFamily="34" charset="-122"/>
+                <a:cs typeface="Pretendard" pitchFamily="34" charset="-120"/>
+              </a:rPr>
+              <a:t>02  차별점</a:t>
+            </a:r>
+            <a:endParaRPr lang="en-US" sz="1200" dirty="0"/>
+          </a:p>
+        </p:txBody>
+      </p:sp>
+      <p:sp>
+        <p:nvSpPr>
+          <p:cNvPr id="3" name="Text 1"/>
+          <p:cNvSpPr/>
+          <p:nvPr/>
+        </p:nvSpPr>
+        <p:spPr>
+          <a:xfrm>
+            <a:off x="457200" y="914400"/>
+            <a:ext cx="11277295" cy="685800"/>
+          </a:xfrm>
+          <a:prstGeom prst="rect">
+            <a:avLst/>
+          </a:prstGeom>
+          <a:noFill/>
+          <a:ln/>
+        </p:spPr>
+        <p:txBody>
+          <a:bodyPr wrap="square" lIns="0" tIns="0" rIns="0" bIns="0" rtlCol="0" anchor="ctr"/>
+          <a:lstStyle/>
+          <a:p>
+            <a:pPr indent="0" marL="0">
+              <a:lnSpc>
+                <a:spcPct val="120000"/>
+              </a:lnSpc>
+              <a:buNone/>
+            </a:pPr>
+            <a:r>
+              <a:rPr lang="en-US" sz="3400" b="1" dirty="0">
+                <a:solidFill>
+                  <a:srgbClr val="222222"/>
+                </a:solidFill>
+                <a:latin typeface="Pretendard" pitchFamily="34" charset="0"/>
+                <a:ea typeface="Pretendard" pitchFamily="34" charset="-122"/>
+                <a:cs typeface="Pretendard" pitchFamily="34" charset="-120"/>
               </a:rPr>
               <a:t>Streamlit으로는 불가능한 기능들</a:t>
             </a:r>
-            <a:endParaRPr lang="en-US" sz="3200" dirty="0"/>
-          </a:p>
-        </p:txBody>
-      </p:sp>
-      <p:sp>
-        <p:nvSpPr>
-          <p:cNvPr id="3" name="Text 1"/>
-          <p:cNvSpPr/>
-          <p:nvPr/>
-        </p:nvSpPr>
-        <p:spPr>
-          <a:xfrm>
-            <a:off x="658368" y="1170432"/>
-            <a:ext cx="10972800" cy="365760"/>
-          </a:xfrm>
-          <a:prstGeom prst="rect">
-            <a:avLst/>
-          </a:prstGeom>
-          <a:noFill/>
-          <a:ln/>
-        </p:spPr>
-        <p:txBody>
-          <a:bodyPr wrap="square" lIns="0" tIns="0" rIns="0" bIns="0" rtlCol="0" anchor="ctr"/>
-          <a:lstStyle/>
-          <a:p>
-            <a:pPr indent="0" marL="0">
-              <a:buNone/>
-            </a:pPr>
-            <a:r>
-              <a:rPr lang="en-US" sz="1500" dirty="0">
-                <a:solidFill>
-                  <a:srgbClr val="9CA3AF"/>
-                </a:solidFill>
-                <a:latin typeface="Calibri" pitchFamily="34" charset="0"/>
-                <a:ea typeface="Calibri" pitchFamily="34" charset="-122"/>
-                <a:cs typeface="Calibri" pitchFamily="34" charset="-120"/>
+            <a:endParaRPr lang="en-US" sz="3400" dirty="0"/>
+          </a:p>
+        </p:txBody>
+      </p:sp>
+      <p:sp>
+        <p:nvSpPr>
+          <p:cNvPr id="4" name="Text 2"/>
+          <p:cNvSpPr/>
+          <p:nvPr/>
+        </p:nvSpPr>
+        <p:spPr>
+          <a:xfrm>
+            <a:off x="457200" y="1490472"/>
+            <a:ext cx="11277295" cy="457200"/>
+          </a:xfrm>
+          <a:prstGeom prst="rect">
+            <a:avLst/>
+          </a:prstGeom>
+          <a:noFill/>
+          <a:ln/>
+        </p:spPr>
+        <p:txBody>
+          <a:bodyPr wrap="square" lIns="0" tIns="0" rIns="0" bIns="0" rtlCol="0" anchor="ctr"/>
+          <a:lstStyle/>
+          <a:p>
+            <a:pPr indent="0" marL="0">
+              <a:lnSpc>
+                <a:spcPct val="145000"/>
+              </a:lnSpc>
+              <a:buNone/>
+            </a:pPr>
+            <a:r>
+              <a:rPr lang="en-US" sz="1600" dirty="0">
+                <a:solidFill>
+                  <a:srgbClr val="45515E"/>
+                </a:solidFill>
+                <a:latin typeface="Pretendard" pitchFamily="34" charset="0"/>
+                <a:ea typeface="Pretendard" pitchFamily="34" charset="-122"/>
+                <a:cs typeface="Pretendard" pitchFamily="34" charset="-120"/>
               </a:rPr>
               <a:t>화면 구성이 아니라 '기술'의 차이 — 모두 브라우저 네이티브 API로 구현</a:t>
             </a:r>
-            <a:endParaRPr lang="en-US" sz="1500" dirty="0"/>
-          </a:p>
-        </p:txBody>
-      </p:sp>
-      <p:sp>
-        <p:nvSpPr>
-          <p:cNvPr id="4" name="Shape 2"/>
-          <p:cNvSpPr/>
-          <p:nvPr/>
-        </p:nvSpPr>
-        <p:spPr>
-          <a:xfrm>
-            <a:off x="640080" y="1828800"/>
-            <a:ext cx="3466490" cy="3566160"/>
-          </a:xfrm>
-          <a:prstGeom prst="roundRect">
-            <a:avLst>
-              <a:gd name="adj" fmla="val 2638"/>
-            </a:avLst>
-          </a:prstGeom>
-          <a:solidFill>
-            <a:srgbClr val="161D29"/>
+            <a:endParaRPr lang="en-US" sz="1600" dirty="0"/>
+          </a:p>
+        </p:txBody>
+      </p:sp>
+      <p:sp>
+        <p:nvSpPr>
+          <p:cNvPr id="5" name="Text 3"/>
+          <p:cNvSpPr/>
+          <p:nvPr/>
+        </p:nvSpPr>
+        <p:spPr>
+          <a:xfrm>
+            <a:off x="457200" y="6446520"/>
+            <a:ext cx="2743200" cy="228600"/>
+          </a:xfrm>
+          <a:prstGeom prst="rect">
+            <a:avLst/>
+          </a:prstGeom>
+          <a:noFill/>
+          <a:ln/>
+        </p:spPr>
+        <p:txBody>
+          <a:bodyPr wrap="square" lIns="0" tIns="0" rIns="0" bIns="0" rtlCol="0" anchor="ctr"/>
+          <a:lstStyle/>
+          <a:p>
+            <a:pPr indent="0" marL="0">
+              <a:buNone/>
+            </a:pPr>
+            <a:r>
+              <a:rPr lang="en-US" sz="1000" dirty="0">
+                <a:solidFill>
+                  <a:srgbClr val="8E8E93"/>
+                </a:solidFill>
+                <a:latin typeface="Pretendard" pitchFamily="34" charset="0"/>
+                <a:ea typeface="Pretendard" pitchFamily="34" charset="-122"/>
+                <a:cs typeface="Pretendard" pitchFamily="34" charset="-120"/>
+              </a:rPr>
+              <a:t>2</a:t>
+            </a:r>
+            <a:endParaRPr lang="en-US" sz="1000" dirty="0"/>
+          </a:p>
+        </p:txBody>
+      </p:sp>
+      <p:sp>
+        <p:nvSpPr>
+          <p:cNvPr id="6" name="Text 4"/>
+          <p:cNvSpPr/>
+          <p:nvPr/>
+        </p:nvSpPr>
+        <p:spPr>
+          <a:xfrm>
+            <a:off x="5333695" y="6446520"/>
+            <a:ext cx="6400800" cy="228600"/>
+          </a:xfrm>
+          <a:prstGeom prst="rect">
+            <a:avLst/>
+          </a:prstGeom>
+          <a:noFill/>
+          <a:ln/>
+        </p:spPr>
+        <p:txBody>
+          <a:bodyPr wrap="square" lIns="0" tIns="0" rIns="0" bIns="0" rtlCol="0" anchor="ctr"/>
+          <a:lstStyle/>
+          <a:p>
+            <a:pPr algn="r" indent="0" marL="0">
+              <a:buNone/>
+            </a:pPr>
+            <a:r>
+              <a:rPr lang="en-US" sz="900" dirty="0">
+                <a:solidFill>
+                  <a:srgbClr val="8E8E93"/>
+                </a:solidFill>
+                <a:latin typeface="Pretendard" pitchFamily="34" charset="0"/>
+                <a:ea typeface="Pretendard" pitchFamily="34" charset="-122"/>
+                <a:cs typeface="Pretendard" pitchFamily="34" charset="-120"/>
+              </a:rPr>
+              <a:t>team-16-project · 2026 전기차 보조금 상담 AI</a:t>
+            </a:r>
+            <a:endParaRPr lang="en-US" sz="900" dirty="0"/>
+          </a:p>
+        </p:txBody>
+      </p:sp>
+      <p:sp>
+        <p:nvSpPr>
+          <p:cNvPr id="7" name="Shape 5"/>
+          <p:cNvSpPr/>
+          <p:nvPr/>
+        </p:nvSpPr>
+        <p:spPr>
+          <a:xfrm>
+            <a:off x="457200" y="2331720"/>
+            <a:ext cx="3576218" cy="2880360"/>
+          </a:xfrm>
+          <a:prstGeom prst="rect">
+            <a:avLst/>
+          </a:prstGeom>
+          <a:solidFill>
+            <a:srgbClr val="FFFFFF"/>
           </a:solidFill>
           <a:ln w="12700">
             <a:solidFill>
-              <a:srgbClr val="26303F"/>
+              <a:srgbClr val="E5E7EB"/>
             </a:solidFill>
             <a:prstDash val="solid"/>
           </a:ln>
           <a:effectLst>
-            <a:outerShdw sx="100000" sy="100000" kx="0" ky="0" algn="bl" rotWithShape="0" blurRad="127000" dist="50800" dir="5400000">
+            <a:outerShdw sx="100000" sy="100000" kx="0" ky="0" algn="bl" rotWithShape="0" blurRad="76200" dist="50800" dir="5400000">
               <a:srgbClr val="000000">
-                <a:alpha val="45000"/>
+                <a:alpha val="8000"/>
               </a:srgbClr>
             </a:outerShdw>
           </a:effectLst>
@@ -1794,39 +2043,34 @@
       </p:sp>
       <p:sp>
         <p:nvSpPr>
-          <p:cNvPr id="5" name="Shape 3"/>
-          <p:cNvSpPr/>
-          <p:nvPr/>
-        </p:nvSpPr>
-        <p:spPr>
-          <a:xfrm>
-            <a:off x="960120" y="2148840"/>
-            <a:ext cx="914400" cy="914400"/>
-          </a:xfrm>
-          <a:prstGeom prst="ellipse">
-            <a:avLst/>
-          </a:prstGeom>
-          <a:solidFill>
-            <a:srgbClr val="112A22"/>
-          </a:solidFill>
-          <a:ln w="15875">
-            <a:solidFill>
-              <a:srgbClr val="10B981"/>
-            </a:solidFill>
-            <a:prstDash val="solid"/>
-          </a:ln>
-        </p:spPr>
-      </p:sp>
-      <p:sp>
-        <p:nvSpPr>
-          <p:cNvPr id="6" name="Text 4"/>
-          <p:cNvSpPr/>
-          <p:nvPr/>
-        </p:nvSpPr>
-        <p:spPr>
-          <a:xfrm>
-            <a:off x="960120" y="2148840"/>
-            <a:ext cx="914400" cy="914400"/>
+          <p:cNvPr id="8" name="Shape 6"/>
+          <p:cNvSpPr/>
+          <p:nvPr/>
+        </p:nvSpPr>
+        <p:spPr>
+          <a:xfrm>
+            <a:off x="731520" y="2624328"/>
+            <a:ext cx="566928" cy="566928"/>
+          </a:xfrm>
+          <a:prstGeom prst="rect">
+            <a:avLst/>
+          </a:prstGeom>
+          <a:solidFill>
+            <a:srgbClr val="1456F0"/>
+          </a:solidFill>
+          <a:ln/>
+        </p:spPr>
+      </p:sp>
+      <p:sp>
+        <p:nvSpPr>
+          <p:cNvPr id="9" name="Text 7"/>
+          <p:cNvSpPr/>
+          <p:nvPr/>
+        </p:nvSpPr>
+        <p:spPr>
+          <a:xfrm>
+            <a:off x="731520" y="2624328"/>
+            <a:ext cx="566928" cy="566928"/>
           </a:xfrm>
           <a:prstGeom prst="rect">
             <a:avLst/>
@@ -1842,108 +2086,108 @@
               <a:buNone/>
             </a:pPr>
             <a:r>
-              <a:rPr lang="en-US" sz="3000" b="1" dirty="0">
-                <a:solidFill>
-                  <a:srgbClr val="34D399"/>
-                </a:solidFill>
-                <a:latin typeface="Calibri" pitchFamily="34" charset="0"/>
-                <a:ea typeface="Calibri" pitchFamily="34" charset="-122"/>
-                <a:cs typeface="Calibri" pitchFamily="34" charset="-120"/>
+              <a:rPr lang="en-US" sz="2200" b="1" dirty="0">
+                <a:solidFill>
+                  <a:srgbClr val="FFFFFF"/>
+                </a:solidFill>
+                <a:latin typeface="Pretendard" pitchFamily="34" charset="0"/>
+                <a:ea typeface="Pretendard" pitchFamily="34" charset="-122"/>
+                <a:cs typeface="Pretendard" pitchFamily="34" charset="-120"/>
               </a:rPr>
               <a:t>1</a:t>
             </a:r>
-            <a:endParaRPr lang="en-US" sz="3000" dirty="0"/>
-          </a:p>
-        </p:txBody>
-      </p:sp>
-      <p:sp>
-        <p:nvSpPr>
-          <p:cNvPr id="7" name="Text 5"/>
-          <p:cNvSpPr/>
-          <p:nvPr/>
-        </p:nvSpPr>
-        <p:spPr>
-          <a:xfrm>
-            <a:off x="960120" y="3200400"/>
-            <a:ext cx="2826410" cy="320040"/>
-          </a:xfrm>
-          <a:prstGeom prst="rect">
-            <a:avLst/>
-          </a:prstGeom>
-          <a:noFill/>
-          <a:ln/>
-        </p:spPr>
-        <p:txBody>
-          <a:bodyPr wrap="square" lIns="0" tIns="0" rIns="0" bIns="0" rtlCol="0" anchor="ctr"/>
-          <a:lstStyle/>
-          <a:p>
-            <a:pPr indent="0" marL="0">
-              <a:buNone/>
-            </a:pPr>
-            <a:r>
-              <a:rPr lang="en-US" sz="1200" b="1" spc="100" kern="0" dirty="0">
-                <a:solidFill>
-                  <a:srgbClr val="34D399"/>
-                </a:solidFill>
-                <a:latin typeface="Calibri" pitchFamily="34" charset="0"/>
-                <a:ea typeface="Calibri" pitchFamily="34" charset="-122"/>
-                <a:cs typeface="Calibri" pitchFamily="34" charset="-120"/>
+            <a:endParaRPr lang="en-US" sz="2200" dirty="0"/>
+          </a:p>
+        </p:txBody>
+      </p:sp>
+      <p:sp>
+        <p:nvSpPr>
+          <p:cNvPr id="10" name="Text 8"/>
+          <p:cNvSpPr/>
+          <p:nvPr/>
+        </p:nvSpPr>
+        <p:spPr>
+          <a:xfrm>
+            <a:off x="731520" y="3383280"/>
+            <a:ext cx="3027578" cy="274320"/>
+          </a:xfrm>
+          <a:prstGeom prst="rect">
+            <a:avLst/>
+          </a:prstGeom>
+          <a:noFill/>
+          <a:ln/>
+        </p:spPr>
+        <p:txBody>
+          <a:bodyPr wrap="square" lIns="0" tIns="0" rIns="0" bIns="0" rtlCol="0" anchor="ctr"/>
+          <a:lstStyle/>
+          <a:p>
+            <a:pPr indent="0" marL="0">
+              <a:buNone/>
+            </a:pPr>
+            <a:r>
+              <a:rPr lang="en-US" sz="1150" b="1" spc="100" kern="0" dirty="0">
+                <a:solidFill>
+                  <a:srgbClr val="1456F0"/>
+                </a:solidFill>
+                <a:latin typeface="Pretendard" pitchFamily="34" charset="0"/>
+                <a:ea typeface="Pretendard" pitchFamily="34" charset="-122"/>
+                <a:cs typeface="Pretendard" pitchFamily="34" charset="-120"/>
               </a:rPr>
               <a:t>STT + TTS</a:t>
             </a:r>
-            <a:endParaRPr lang="en-US" sz="1200" dirty="0"/>
-          </a:p>
-        </p:txBody>
-      </p:sp>
-      <p:sp>
-        <p:nvSpPr>
-          <p:cNvPr id="8" name="Text 6"/>
-          <p:cNvSpPr/>
-          <p:nvPr/>
-        </p:nvSpPr>
-        <p:spPr>
-          <a:xfrm>
-            <a:off x="960120" y="3493008"/>
-            <a:ext cx="2826410" cy="548640"/>
-          </a:xfrm>
-          <a:prstGeom prst="rect">
-            <a:avLst/>
-          </a:prstGeom>
-          <a:noFill/>
-          <a:ln/>
-        </p:spPr>
-        <p:txBody>
-          <a:bodyPr wrap="square" lIns="0" tIns="0" rIns="0" bIns="0" rtlCol="0" anchor="ctr"/>
-          <a:lstStyle/>
-          <a:p>
-            <a:pPr indent="0" marL="0">
-              <a:buNone/>
-            </a:pPr>
-            <a:r>
-              <a:rPr lang="en-US" sz="1900" b="1" dirty="0">
-                <a:solidFill>
-                  <a:srgbClr val="FFFFFF"/>
-                </a:solidFill>
-                <a:latin typeface="Calibri" pitchFamily="34" charset="0"/>
-                <a:ea typeface="Calibri" pitchFamily="34" charset="-122"/>
-                <a:cs typeface="Calibri" pitchFamily="34" charset="-120"/>
+            <a:endParaRPr lang="en-US" sz="1150" dirty="0"/>
+          </a:p>
+        </p:txBody>
+      </p:sp>
+      <p:sp>
+        <p:nvSpPr>
+          <p:cNvPr id="11" name="Text 9"/>
+          <p:cNvSpPr/>
+          <p:nvPr/>
+        </p:nvSpPr>
+        <p:spPr>
+          <a:xfrm>
+            <a:off x="731520" y="3666744"/>
+            <a:ext cx="3027578" cy="502920"/>
+          </a:xfrm>
+          <a:prstGeom prst="rect">
+            <a:avLst/>
+          </a:prstGeom>
+          <a:noFill/>
+          <a:ln/>
+        </p:spPr>
+        <p:txBody>
+          <a:bodyPr wrap="square" lIns="0" tIns="0" rIns="0" bIns="0" rtlCol="0" anchor="ctr"/>
+          <a:lstStyle/>
+          <a:p>
+            <a:pPr indent="0" marL="0">
+              <a:buNone/>
+            </a:pPr>
+            <a:r>
+              <a:rPr lang="en-US" sz="1800" b="1" dirty="0">
+                <a:solidFill>
+                  <a:srgbClr val="222222"/>
+                </a:solidFill>
+                <a:latin typeface="Pretendard" pitchFamily="34" charset="0"/>
+                <a:ea typeface="Pretendard" pitchFamily="34" charset="-122"/>
+                <a:cs typeface="Pretendard" pitchFamily="34" charset="-120"/>
               </a:rPr>
               <a:t>음성 대화</a:t>
             </a:r>
-            <a:endParaRPr lang="en-US" sz="1900" dirty="0"/>
-          </a:p>
-        </p:txBody>
-      </p:sp>
-      <p:sp>
-        <p:nvSpPr>
-          <p:cNvPr id="9" name="Text 7"/>
-          <p:cNvSpPr/>
-          <p:nvPr/>
-        </p:nvSpPr>
-        <p:spPr>
-          <a:xfrm>
-            <a:off x="960120" y="4114800"/>
-            <a:ext cx="2826410" cy="1097280"/>
+            <a:endParaRPr lang="en-US" sz="1800" dirty="0"/>
+          </a:p>
+        </p:txBody>
+      </p:sp>
+      <p:sp>
+        <p:nvSpPr>
+          <p:cNvPr id="12" name="Text 10"/>
+          <p:cNvSpPr/>
+          <p:nvPr/>
+        </p:nvSpPr>
+        <p:spPr>
+          <a:xfrm>
+            <a:off x="731520" y="4233672"/>
+            <a:ext cx="3027578" cy="868680"/>
           </a:xfrm>
           <a:prstGeom prst="rect">
             <a:avLst/>
@@ -1957,54 +2201,52 @@
           <a:p>
             <a:pPr indent="0" marL="0">
               <a:lnSpc>
-                <a:spcPct val="125000"/>
+                <a:spcPct val="145000"/>
               </a:lnSpc>
               <a:buNone/>
             </a:pPr>
             <a:r>
-              <a:rPr lang="en-US" sz="1350" dirty="0">
-                <a:solidFill>
-                  <a:srgbClr val="9CA3AF"/>
-                </a:solidFill>
-                <a:latin typeface="Calibri" pitchFamily="34" charset="0"/>
-                <a:ea typeface="Calibri" pitchFamily="34" charset="-122"/>
-                <a:cs typeface="Calibri" pitchFamily="34" charset="-120"/>
+              <a:rPr lang="en-US" sz="1300" dirty="0">
+                <a:solidFill>
+                  <a:srgbClr val="45515E"/>
+                </a:solidFill>
+                <a:latin typeface="Pretendard" pitchFamily="34" charset="0"/>
+                <a:ea typeface="Pretendard" pitchFamily="34" charset="-122"/>
+                <a:cs typeface="Pretendard" pitchFamily="34" charset="-120"/>
               </a:rPr>
               <a:t>말로 질문하면 음성인식으로 전송(STT), 챗봇 답변을 음성으로 낭독(TTS). 브라우저 Web Speech API.</a:t>
             </a:r>
-            <a:endParaRPr lang="en-US" sz="1350" dirty="0"/>
-          </a:p>
-        </p:txBody>
-      </p:sp>
-      <p:sp>
-        <p:nvSpPr>
-          <p:cNvPr id="10" name="Shape 8"/>
-          <p:cNvSpPr/>
-          <p:nvPr/>
-        </p:nvSpPr>
-        <p:spPr>
-          <a:xfrm>
-            <a:off x="4362602" y="1828800"/>
-            <a:ext cx="3466490" cy="3566160"/>
-          </a:xfrm>
-          <a:prstGeom prst="roundRect">
-            <a:avLst>
-              <a:gd name="adj" fmla="val 2638"/>
-            </a:avLst>
-          </a:prstGeom>
-          <a:solidFill>
-            <a:srgbClr val="161D29"/>
+            <a:endParaRPr lang="en-US" sz="1300" dirty="0"/>
+          </a:p>
+        </p:txBody>
+      </p:sp>
+      <p:sp>
+        <p:nvSpPr>
+          <p:cNvPr id="13" name="Shape 11"/>
+          <p:cNvSpPr/>
+          <p:nvPr/>
+        </p:nvSpPr>
+        <p:spPr>
+          <a:xfrm>
+            <a:off x="4307738" y="2331720"/>
+            <a:ext cx="3576218" cy="2880360"/>
+          </a:xfrm>
+          <a:prstGeom prst="rect">
+            <a:avLst/>
+          </a:prstGeom>
+          <a:solidFill>
+            <a:srgbClr val="FFFFFF"/>
           </a:solidFill>
           <a:ln w="12700">
             <a:solidFill>
-              <a:srgbClr val="26303F"/>
+              <a:srgbClr val="E5E7EB"/>
             </a:solidFill>
             <a:prstDash val="solid"/>
           </a:ln>
           <a:effectLst>
-            <a:outerShdw sx="100000" sy="100000" kx="0" ky="0" algn="bl" rotWithShape="0" blurRad="127000" dist="50800" dir="5400000">
+            <a:outerShdw sx="100000" sy="100000" kx="0" ky="0" algn="bl" rotWithShape="0" blurRad="76200" dist="50800" dir="5400000">
               <a:srgbClr val="000000">
-                <a:alpha val="45000"/>
+                <a:alpha val="8000"/>
               </a:srgbClr>
             </a:outerShdw>
           </a:effectLst>
@@ -2012,39 +2254,34 @@
       </p:sp>
       <p:sp>
         <p:nvSpPr>
-          <p:cNvPr id="11" name="Shape 9"/>
-          <p:cNvSpPr/>
-          <p:nvPr/>
-        </p:nvSpPr>
-        <p:spPr>
-          <a:xfrm>
-            <a:off x="4682642" y="2148840"/>
-            <a:ext cx="914400" cy="914400"/>
-          </a:xfrm>
-          <a:prstGeom prst="ellipse">
-            <a:avLst/>
-          </a:prstGeom>
-          <a:solidFill>
-            <a:srgbClr val="112A22"/>
-          </a:solidFill>
-          <a:ln w="15875">
-            <a:solidFill>
-              <a:srgbClr val="10B981"/>
-            </a:solidFill>
-            <a:prstDash val="solid"/>
-          </a:ln>
-        </p:spPr>
-      </p:sp>
-      <p:sp>
-        <p:nvSpPr>
-          <p:cNvPr id="12" name="Text 10"/>
-          <p:cNvSpPr/>
-          <p:nvPr/>
-        </p:nvSpPr>
-        <p:spPr>
-          <a:xfrm>
-            <a:off x="4682642" y="2148840"/>
-            <a:ext cx="914400" cy="914400"/>
+          <p:cNvPr id="14" name="Shape 12"/>
+          <p:cNvSpPr/>
+          <p:nvPr/>
+        </p:nvSpPr>
+        <p:spPr>
+          <a:xfrm>
+            <a:off x="4582058" y="2624328"/>
+            <a:ext cx="566928" cy="566928"/>
+          </a:xfrm>
+          <a:prstGeom prst="rect">
+            <a:avLst/>
+          </a:prstGeom>
+          <a:solidFill>
+            <a:srgbClr val="1456F0"/>
+          </a:solidFill>
+          <a:ln/>
+        </p:spPr>
+      </p:sp>
+      <p:sp>
+        <p:nvSpPr>
+          <p:cNvPr id="15" name="Text 13"/>
+          <p:cNvSpPr/>
+          <p:nvPr/>
+        </p:nvSpPr>
+        <p:spPr>
+          <a:xfrm>
+            <a:off x="4582058" y="2624328"/>
+            <a:ext cx="566928" cy="566928"/>
           </a:xfrm>
           <a:prstGeom prst="rect">
             <a:avLst/>
@@ -2060,108 +2297,108 @@
               <a:buNone/>
             </a:pPr>
             <a:r>
-              <a:rPr lang="en-US" sz="3000" b="1" dirty="0">
-                <a:solidFill>
-                  <a:srgbClr val="34D399"/>
-                </a:solidFill>
-                <a:latin typeface="Calibri" pitchFamily="34" charset="0"/>
-                <a:ea typeface="Calibri" pitchFamily="34" charset="-122"/>
-                <a:cs typeface="Calibri" pitchFamily="34" charset="-120"/>
+              <a:rPr lang="en-US" sz="2200" b="1" dirty="0">
+                <a:solidFill>
+                  <a:srgbClr val="FFFFFF"/>
+                </a:solidFill>
+                <a:latin typeface="Pretendard" pitchFamily="34" charset="0"/>
+                <a:ea typeface="Pretendard" pitchFamily="34" charset="-122"/>
+                <a:cs typeface="Pretendard" pitchFamily="34" charset="-120"/>
               </a:rPr>
               <a:t>2</a:t>
             </a:r>
-            <a:endParaRPr lang="en-US" sz="3000" dirty="0"/>
-          </a:p>
-        </p:txBody>
-      </p:sp>
-      <p:sp>
-        <p:nvSpPr>
-          <p:cNvPr id="13" name="Text 11"/>
-          <p:cNvSpPr/>
-          <p:nvPr/>
-        </p:nvSpPr>
-        <p:spPr>
-          <a:xfrm>
-            <a:off x="4682642" y="3200400"/>
-            <a:ext cx="2826410" cy="320040"/>
-          </a:xfrm>
-          <a:prstGeom prst="rect">
-            <a:avLst/>
-          </a:prstGeom>
-          <a:noFill/>
-          <a:ln/>
-        </p:spPr>
-        <p:txBody>
-          <a:bodyPr wrap="square" lIns="0" tIns="0" rIns="0" bIns="0" rtlCol="0" anchor="ctr"/>
-          <a:lstStyle/>
-          <a:p>
-            <a:pPr indent="0" marL="0">
-              <a:buNone/>
-            </a:pPr>
-            <a:r>
-              <a:rPr lang="en-US" sz="1200" b="1" spc="100" kern="0" dirty="0">
-                <a:solidFill>
-                  <a:srgbClr val="34D399"/>
-                </a:solidFill>
-                <a:latin typeface="Calibri" pitchFamily="34" charset="0"/>
-                <a:ea typeface="Calibri" pitchFamily="34" charset="-122"/>
-                <a:cs typeface="Calibri" pitchFamily="34" charset="-120"/>
+            <a:endParaRPr lang="en-US" sz="2200" dirty="0"/>
+          </a:p>
+        </p:txBody>
+      </p:sp>
+      <p:sp>
+        <p:nvSpPr>
+          <p:cNvPr id="16" name="Text 14"/>
+          <p:cNvSpPr/>
+          <p:nvPr/>
+        </p:nvSpPr>
+        <p:spPr>
+          <a:xfrm>
+            <a:off x="4582058" y="3383280"/>
+            <a:ext cx="3027578" cy="274320"/>
+          </a:xfrm>
+          <a:prstGeom prst="rect">
+            <a:avLst/>
+          </a:prstGeom>
+          <a:noFill/>
+          <a:ln/>
+        </p:spPr>
+        <p:txBody>
+          <a:bodyPr wrap="square" lIns="0" tIns="0" rIns="0" bIns="0" rtlCol="0" anchor="ctr"/>
+          <a:lstStyle/>
+          <a:p>
+            <a:pPr indent="0" marL="0">
+              <a:buNone/>
+            </a:pPr>
+            <a:r>
+              <a:rPr lang="en-US" sz="1150" b="1" spc="100" kern="0" dirty="0">
+                <a:solidFill>
+                  <a:srgbClr val="1456F0"/>
+                </a:solidFill>
+                <a:latin typeface="Pretendard" pitchFamily="34" charset="0"/>
+                <a:ea typeface="Pretendard" pitchFamily="34" charset="-122"/>
+                <a:cs typeface="Pretendard" pitchFamily="34" charset="-120"/>
               </a:rPr>
               <a:t>three.js</a:t>
             </a:r>
-            <a:endParaRPr lang="en-US" sz="1200" dirty="0"/>
-          </a:p>
-        </p:txBody>
-      </p:sp>
-      <p:sp>
-        <p:nvSpPr>
-          <p:cNvPr id="14" name="Text 12"/>
-          <p:cNvSpPr/>
-          <p:nvPr/>
-        </p:nvSpPr>
-        <p:spPr>
-          <a:xfrm>
-            <a:off x="4682642" y="3493008"/>
-            <a:ext cx="2826410" cy="548640"/>
-          </a:xfrm>
-          <a:prstGeom prst="rect">
-            <a:avLst/>
-          </a:prstGeom>
-          <a:noFill/>
-          <a:ln/>
-        </p:spPr>
-        <p:txBody>
-          <a:bodyPr wrap="square" lIns="0" tIns="0" rIns="0" bIns="0" rtlCol="0" anchor="ctr"/>
-          <a:lstStyle/>
-          <a:p>
-            <a:pPr indent="0" marL="0">
-              <a:buNone/>
-            </a:pPr>
-            <a:r>
-              <a:rPr lang="en-US" sz="1900" b="1" dirty="0">
-                <a:solidFill>
-                  <a:srgbClr val="FFFFFF"/>
-                </a:solidFill>
-                <a:latin typeface="Calibri" pitchFamily="34" charset="0"/>
-                <a:ea typeface="Calibri" pitchFamily="34" charset="-122"/>
-                <a:cs typeface="Calibri" pitchFamily="34" charset="-120"/>
+            <a:endParaRPr lang="en-US" sz="1150" dirty="0"/>
+          </a:p>
+        </p:txBody>
+      </p:sp>
+      <p:sp>
+        <p:nvSpPr>
+          <p:cNvPr id="17" name="Text 15"/>
+          <p:cNvSpPr/>
+          <p:nvPr/>
+        </p:nvSpPr>
+        <p:spPr>
+          <a:xfrm>
+            <a:off x="4582058" y="3666744"/>
+            <a:ext cx="3027578" cy="502920"/>
+          </a:xfrm>
+          <a:prstGeom prst="rect">
+            <a:avLst/>
+          </a:prstGeom>
+          <a:noFill/>
+          <a:ln/>
+        </p:spPr>
+        <p:txBody>
+          <a:bodyPr wrap="square" lIns="0" tIns="0" rIns="0" bIns="0" rtlCol="0" anchor="ctr"/>
+          <a:lstStyle/>
+          <a:p>
+            <a:pPr indent="0" marL="0">
+              <a:buNone/>
+            </a:pPr>
+            <a:r>
+              <a:rPr lang="en-US" sz="1800" b="1" dirty="0">
+                <a:solidFill>
+                  <a:srgbClr val="222222"/>
+                </a:solidFill>
+                <a:latin typeface="Pretendard" pitchFamily="34" charset="0"/>
+                <a:ea typeface="Pretendard" pitchFamily="34" charset="-122"/>
+                <a:cs typeface="Pretendard" pitchFamily="34" charset="-120"/>
               </a:rPr>
               <a:t>3D · 인터랙티브 지도</a:t>
             </a:r>
-            <a:endParaRPr lang="en-US" sz="1900" dirty="0"/>
-          </a:p>
-        </p:txBody>
-      </p:sp>
-      <p:sp>
-        <p:nvSpPr>
-          <p:cNvPr id="15" name="Text 13"/>
-          <p:cNvSpPr/>
-          <p:nvPr/>
-        </p:nvSpPr>
-        <p:spPr>
-          <a:xfrm>
-            <a:off x="4682642" y="4114800"/>
-            <a:ext cx="2826410" cy="1097280"/>
+            <a:endParaRPr lang="en-US" sz="1800" dirty="0"/>
+          </a:p>
+        </p:txBody>
+      </p:sp>
+      <p:sp>
+        <p:nvSpPr>
+          <p:cNvPr id="18" name="Text 16"/>
+          <p:cNvSpPr/>
+          <p:nvPr/>
+        </p:nvSpPr>
+        <p:spPr>
+          <a:xfrm>
+            <a:off x="4582058" y="4233672"/>
+            <a:ext cx="3027578" cy="868680"/>
           </a:xfrm>
           <a:prstGeom prst="rect">
             <a:avLst/>
@@ -2175,54 +2412,52 @@
           <a:p>
             <a:pPr indent="0" marL="0">
               <a:lnSpc>
-                <a:spcPct val="125000"/>
+                <a:spcPct val="145000"/>
               </a:lnSpc>
               <a:buNone/>
             </a:pPr>
             <a:r>
-              <a:rPr lang="en-US" sz="1350" dirty="0">
-                <a:solidFill>
-                  <a:srgbClr val="9CA3AF"/>
-                </a:solidFill>
-                <a:latin typeface="Calibri" pitchFamily="34" charset="0"/>
-                <a:ea typeface="Calibri" pitchFamily="34" charset="-122"/>
-                <a:cs typeface="Calibri" pitchFamily="34" charset="-120"/>
+              <a:rPr lang="en-US" sz="1300" dirty="0">
+                <a:solidFill>
+                  <a:srgbClr val="45515E"/>
+                </a:solidFill>
+                <a:latin typeface="Pretendard" pitchFamily="34" charset="0"/>
+                <a:ea typeface="Pretendard" pitchFamily="34" charset="-122"/>
+                <a:cs typeface="Pretendard" pitchFamily="34" charset="-120"/>
               </a:rPr>
               <a:t>WebGL 3D 지도 + 시·군·구 실시간 하이라이트. 금액이 확정되면 숫자 카운트업 애니메이션.</a:t>
             </a:r>
-            <a:endParaRPr lang="en-US" sz="1350" dirty="0"/>
-          </a:p>
-        </p:txBody>
-      </p:sp>
-      <p:sp>
-        <p:nvSpPr>
-          <p:cNvPr id="16" name="Shape 14"/>
-          <p:cNvSpPr/>
-          <p:nvPr/>
-        </p:nvSpPr>
-        <p:spPr>
-          <a:xfrm>
-            <a:off x="8085125" y="1828800"/>
-            <a:ext cx="3466490" cy="3566160"/>
-          </a:xfrm>
-          <a:prstGeom prst="roundRect">
-            <a:avLst>
-              <a:gd name="adj" fmla="val 2638"/>
-            </a:avLst>
-          </a:prstGeom>
-          <a:solidFill>
-            <a:srgbClr val="161D29"/>
+            <a:endParaRPr lang="en-US" sz="1300" dirty="0"/>
+          </a:p>
+        </p:txBody>
+      </p:sp>
+      <p:sp>
+        <p:nvSpPr>
+          <p:cNvPr id="19" name="Shape 17"/>
+          <p:cNvSpPr/>
+          <p:nvPr/>
+        </p:nvSpPr>
+        <p:spPr>
+          <a:xfrm>
+            <a:off x="8158277" y="2331720"/>
+            <a:ext cx="3576218" cy="2880360"/>
+          </a:xfrm>
+          <a:prstGeom prst="rect">
+            <a:avLst/>
+          </a:prstGeom>
+          <a:solidFill>
+            <a:srgbClr val="FFFFFF"/>
           </a:solidFill>
           <a:ln w="12700">
             <a:solidFill>
-              <a:srgbClr val="26303F"/>
+              <a:srgbClr val="E5E7EB"/>
             </a:solidFill>
             <a:prstDash val="solid"/>
           </a:ln>
           <a:effectLst>
-            <a:outerShdw sx="100000" sy="100000" kx="0" ky="0" algn="bl" rotWithShape="0" blurRad="127000" dist="50800" dir="5400000">
+            <a:outerShdw sx="100000" sy="100000" kx="0" ky="0" algn="bl" rotWithShape="0" blurRad="76200" dist="50800" dir="5400000">
               <a:srgbClr val="000000">
-                <a:alpha val="45000"/>
+                <a:alpha val="8000"/>
               </a:srgbClr>
             </a:outerShdw>
           </a:effectLst>
@@ -2230,39 +2465,34 @@
       </p:sp>
       <p:sp>
         <p:nvSpPr>
-          <p:cNvPr id="17" name="Shape 15"/>
-          <p:cNvSpPr/>
-          <p:nvPr/>
-        </p:nvSpPr>
-        <p:spPr>
-          <a:xfrm>
-            <a:off x="8405165" y="2148840"/>
-            <a:ext cx="914400" cy="914400"/>
-          </a:xfrm>
-          <a:prstGeom prst="ellipse">
-            <a:avLst/>
-          </a:prstGeom>
-          <a:solidFill>
-            <a:srgbClr val="112A22"/>
-          </a:solidFill>
-          <a:ln w="15875">
-            <a:solidFill>
-              <a:srgbClr val="10B981"/>
-            </a:solidFill>
-            <a:prstDash val="solid"/>
-          </a:ln>
-        </p:spPr>
-      </p:sp>
-      <p:sp>
-        <p:nvSpPr>
-          <p:cNvPr id="18" name="Text 16"/>
-          <p:cNvSpPr/>
-          <p:nvPr/>
-        </p:nvSpPr>
-        <p:spPr>
-          <a:xfrm>
-            <a:off x="8405165" y="2148840"/>
-            <a:ext cx="914400" cy="914400"/>
+          <p:cNvPr id="20" name="Shape 18"/>
+          <p:cNvSpPr/>
+          <p:nvPr/>
+        </p:nvSpPr>
+        <p:spPr>
+          <a:xfrm>
+            <a:off x="8432597" y="2624328"/>
+            <a:ext cx="566928" cy="566928"/>
+          </a:xfrm>
+          <a:prstGeom prst="rect">
+            <a:avLst/>
+          </a:prstGeom>
+          <a:solidFill>
+            <a:srgbClr val="1456F0"/>
+          </a:solidFill>
+          <a:ln/>
+        </p:spPr>
+      </p:sp>
+      <p:sp>
+        <p:nvSpPr>
+          <p:cNvPr id="21" name="Text 19"/>
+          <p:cNvSpPr/>
+          <p:nvPr/>
+        </p:nvSpPr>
+        <p:spPr>
+          <a:xfrm>
+            <a:off x="8432597" y="2624328"/>
+            <a:ext cx="566928" cy="566928"/>
           </a:xfrm>
           <a:prstGeom prst="rect">
             <a:avLst/>
@@ -2278,205 +2508,196 @@
               <a:buNone/>
             </a:pPr>
             <a:r>
-              <a:rPr lang="en-US" sz="3000" b="1" dirty="0">
-                <a:solidFill>
-                  <a:srgbClr val="34D399"/>
-                </a:solidFill>
-                <a:latin typeface="Calibri" pitchFamily="34" charset="0"/>
-                <a:ea typeface="Calibri" pitchFamily="34" charset="-122"/>
-                <a:cs typeface="Calibri" pitchFamily="34" charset="-120"/>
+              <a:rPr lang="en-US" sz="2200" b="1" dirty="0">
+                <a:solidFill>
+                  <a:srgbClr val="FFFFFF"/>
+                </a:solidFill>
+                <a:latin typeface="Pretendard" pitchFamily="34" charset="0"/>
+                <a:ea typeface="Pretendard" pitchFamily="34" charset="-122"/>
+                <a:cs typeface="Pretendard" pitchFamily="34" charset="-120"/>
               </a:rPr>
               <a:t>3</a:t>
             </a:r>
-            <a:endParaRPr lang="en-US" sz="3000" dirty="0"/>
-          </a:p>
-        </p:txBody>
-      </p:sp>
-      <p:sp>
-        <p:nvSpPr>
-          <p:cNvPr id="19" name="Text 17"/>
-          <p:cNvSpPr/>
-          <p:nvPr/>
-        </p:nvSpPr>
-        <p:spPr>
-          <a:xfrm>
-            <a:off x="8405165" y="3200400"/>
-            <a:ext cx="2826410" cy="320040"/>
-          </a:xfrm>
-          <a:prstGeom prst="rect">
-            <a:avLst/>
-          </a:prstGeom>
-          <a:noFill/>
-          <a:ln/>
-        </p:spPr>
-        <p:txBody>
-          <a:bodyPr wrap="square" lIns="0" tIns="0" rIns="0" bIns="0" rtlCol="0" anchor="ctr"/>
-          <a:lstStyle/>
-          <a:p>
-            <a:pPr indent="0" marL="0">
-              <a:buNone/>
-            </a:pPr>
-            <a:r>
-              <a:rPr lang="en-US" sz="1200" b="1" spc="100" kern="0" dirty="0">
-                <a:solidFill>
-                  <a:srgbClr val="34D399"/>
-                </a:solidFill>
-                <a:latin typeface="Calibri" pitchFamily="34" charset="0"/>
-                <a:ea typeface="Calibri" pitchFamily="34" charset="-122"/>
-                <a:cs typeface="Calibri" pitchFamily="34" charset="-120"/>
+            <a:endParaRPr lang="en-US" sz="2200" dirty="0"/>
+          </a:p>
+        </p:txBody>
+      </p:sp>
+      <p:sp>
+        <p:nvSpPr>
+          <p:cNvPr id="22" name="Text 20"/>
+          <p:cNvSpPr/>
+          <p:nvPr/>
+        </p:nvSpPr>
+        <p:spPr>
+          <a:xfrm>
+            <a:off x="8432597" y="3383280"/>
+            <a:ext cx="3027578" cy="274320"/>
+          </a:xfrm>
+          <a:prstGeom prst="rect">
+            <a:avLst/>
+          </a:prstGeom>
+          <a:noFill/>
+          <a:ln/>
+        </p:spPr>
+        <p:txBody>
+          <a:bodyPr wrap="square" lIns="0" tIns="0" rIns="0" bIns="0" rtlCol="0" anchor="ctr"/>
+          <a:lstStyle/>
+          <a:p>
+            <a:pPr indent="0" marL="0">
+              <a:buNone/>
+            </a:pPr>
+            <a:r>
+              <a:rPr lang="en-US" sz="1150" b="1" spc="100" kern="0" dirty="0">
+                <a:solidFill>
+                  <a:srgbClr val="1456F0"/>
+                </a:solidFill>
+                <a:latin typeface="Pretendard" pitchFamily="34" charset="0"/>
+                <a:ea typeface="Pretendard" pitchFamily="34" charset="-122"/>
+                <a:cs typeface="Pretendard" pitchFamily="34" charset="-120"/>
               </a:rPr>
               <a:t>Service Worker</a:t>
             </a:r>
-            <a:endParaRPr lang="en-US" sz="1200" dirty="0"/>
-          </a:p>
-        </p:txBody>
-      </p:sp>
-      <p:sp>
-        <p:nvSpPr>
-          <p:cNvPr id="20" name="Text 18"/>
-          <p:cNvSpPr/>
-          <p:nvPr/>
-        </p:nvSpPr>
-        <p:spPr>
-          <a:xfrm>
-            <a:off x="8405165" y="3493008"/>
-            <a:ext cx="2826410" cy="548640"/>
-          </a:xfrm>
-          <a:prstGeom prst="rect">
-            <a:avLst/>
-          </a:prstGeom>
-          <a:noFill/>
-          <a:ln/>
-        </p:spPr>
-        <p:txBody>
-          <a:bodyPr wrap="square" lIns="0" tIns="0" rIns="0" bIns="0" rtlCol="0" anchor="ctr"/>
-          <a:lstStyle/>
-          <a:p>
-            <a:pPr indent="0" marL="0">
-              <a:buNone/>
-            </a:pPr>
-            <a:r>
-              <a:rPr lang="en-US" sz="1900" b="1" dirty="0">
+            <a:endParaRPr lang="en-US" sz="1150" dirty="0"/>
+          </a:p>
+        </p:txBody>
+      </p:sp>
+      <p:sp>
+        <p:nvSpPr>
+          <p:cNvPr id="23" name="Text 21"/>
+          <p:cNvSpPr/>
+          <p:nvPr/>
+        </p:nvSpPr>
+        <p:spPr>
+          <a:xfrm>
+            <a:off x="8432597" y="3666744"/>
+            <a:ext cx="3027578" cy="502920"/>
+          </a:xfrm>
+          <a:prstGeom prst="rect">
+            <a:avLst/>
+          </a:prstGeom>
+          <a:noFill/>
+          <a:ln/>
+        </p:spPr>
+        <p:txBody>
+          <a:bodyPr wrap="square" lIns="0" tIns="0" rIns="0" bIns="0" rtlCol="0" anchor="ctr"/>
+          <a:lstStyle/>
+          <a:p>
+            <a:pPr indent="0" marL="0">
+              <a:buNone/>
+            </a:pPr>
+            <a:r>
+              <a:rPr lang="en-US" sz="1800" b="1" dirty="0">
+                <a:solidFill>
+                  <a:srgbClr val="222222"/>
+                </a:solidFill>
+                <a:latin typeface="Pretendard" pitchFamily="34" charset="0"/>
+                <a:ea typeface="Pretendard" pitchFamily="34" charset="-122"/>
+                <a:cs typeface="Pretendard" pitchFamily="34" charset="-120"/>
+              </a:rPr>
+              <a:t>PWA 설치형 앱</a:t>
+            </a:r>
+            <a:endParaRPr lang="en-US" sz="1800" dirty="0"/>
+          </a:p>
+        </p:txBody>
+      </p:sp>
+      <p:sp>
+        <p:nvSpPr>
+          <p:cNvPr id="24" name="Text 22"/>
+          <p:cNvSpPr/>
+          <p:nvPr/>
+        </p:nvSpPr>
+        <p:spPr>
+          <a:xfrm>
+            <a:off x="8432597" y="4233672"/>
+            <a:ext cx="3027578" cy="868680"/>
+          </a:xfrm>
+          <a:prstGeom prst="rect">
+            <a:avLst/>
+          </a:prstGeom>
+          <a:noFill/>
+          <a:ln/>
+        </p:spPr>
+        <p:txBody>
+          <a:bodyPr wrap="square" lIns="0" tIns="0" rIns="0" bIns="0" rtlCol="0" anchor="ctr"/>
+          <a:lstStyle/>
+          <a:p>
+            <a:pPr indent="0" marL="0">
+              <a:lnSpc>
+                <a:spcPct val="145000"/>
+              </a:lnSpc>
+              <a:buNone/>
+            </a:pPr>
+            <a:r>
+              <a:rPr lang="en-US" sz="1300" dirty="0">
+                <a:solidFill>
+                  <a:srgbClr val="45515E"/>
+                </a:solidFill>
+                <a:latin typeface="Pretendard" pitchFamily="34" charset="0"/>
+                <a:ea typeface="Pretendard" pitchFamily="34" charset="-122"/>
+                <a:cs typeface="Pretendard" pitchFamily="34" charset="-120"/>
+              </a:rPr>
+              <a:t>홈 화면에 앱처럼 설치하고, 오프라인 캐싱으로 네트워크 없이도 실행.</a:t>
+            </a:r>
+            <a:endParaRPr lang="en-US" sz="1300" dirty="0"/>
+          </a:p>
+        </p:txBody>
+      </p:sp>
+      <p:sp>
+        <p:nvSpPr>
+          <p:cNvPr id="25" name="Shape 23"/>
+          <p:cNvSpPr/>
+          <p:nvPr/>
+        </p:nvSpPr>
+        <p:spPr>
+          <a:xfrm>
+            <a:off x="457200" y="5440680"/>
+            <a:ext cx="11277295" cy="621792"/>
+          </a:xfrm>
+          <a:prstGeom prst="rect">
+            <a:avLst/>
+          </a:prstGeom>
+          <a:solidFill>
+            <a:srgbClr val="1456F0"/>
+          </a:solidFill>
+          <a:ln/>
+        </p:spPr>
+      </p:sp>
+      <p:sp>
+        <p:nvSpPr>
+          <p:cNvPr id="26" name="Text 24"/>
+          <p:cNvSpPr/>
+          <p:nvPr/>
+        </p:nvSpPr>
+        <p:spPr>
+          <a:xfrm>
+            <a:off x="457200" y="5440680"/>
+            <a:ext cx="11277295" cy="621792"/>
+          </a:xfrm>
+          <a:prstGeom prst="rect">
+            <a:avLst/>
+          </a:prstGeom>
+          <a:noFill/>
+          <a:ln/>
+        </p:spPr>
+        <p:txBody>
+          <a:bodyPr wrap="square" lIns="0" tIns="0" rIns="0" bIns="0" rtlCol="0" anchor="ctr"/>
+          <a:lstStyle/>
+          <a:p>
+            <a:pPr algn="ctr" indent="0" marL="0">
+              <a:buNone/>
+            </a:pPr>
+            <a:r>
+              <a:rPr lang="en-US" sz="1600" b="1" dirty="0">
                 <a:solidFill>
                   <a:srgbClr val="FFFFFF"/>
                 </a:solidFill>
-                <a:latin typeface="Calibri" pitchFamily="34" charset="0"/>
-                <a:ea typeface="Calibri" pitchFamily="34" charset="-122"/>
-                <a:cs typeface="Calibri" pitchFamily="34" charset="-120"/>
-              </a:rPr>
-              <a:t>PWA 설치형 앱</a:t>
-            </a:r>
-            <a:endParaRPr lang="en-US" sz="1900" dirty="0"/>
-          </a:p>
-        </p:txBody>
-      </p:sp>
-      <p:sp>
-        <p:nvSpPr>
-          <p:cNvPr id="21" name="Text 19"/>
-          <p:cNvSpPr/>
-          <p:nvPr/>
-        </p:nvSpPr>
-        <p:spPr>
-          <a:xfrm>
-            <a:off x="8405165" y="4114800"/>
-            <a:ext cx="2826410" cy="1097280"/>
-          </a:xfrm>
-          <a:prstGeom prst="rect">
-            <a:avLst/>
-          </a:prstGeom>
-          <a:noFill/>
-          <a:ln/>
-        </p:spPr>
-        <p:txBody>
-          <a:bodyPr wrap="square" lIns="0" tIns="0" rIns="0" bIns="0" rtlCol="0" anchor="ctr"/>
-          <a:lstStyle/>
-          <a:p>
-            <a:pPr indent="0" marL="0">
-              <a:lnSpc>
-                <a:spcPct val="125000"/>
-              </a:lnSpc>
-              <a:buNone/>
-            </a:pPr>
-            <a:r>
-              <a:rPr lang="en-US" sz="1350" dirty="0">
-                <a:solidFill>
-                  <a:srgbClr val="9CA3AF"/>
-                </a:solidFill>
-                <a:latin typeface="Calibri" pitchFamily="34" charset="0"/>
-                <a:ea typeface="Calibri" pitchFamily="34" charset="-122"/>
-                <a:cs typeface="Calibri" pitchFamily="34" charset="-120"/>
-              </a:rPr>
-              <a:t>홈 화면에 앱처럼 설치하고, 오프라인 캐싱으로 네트워크 없이도 실행.</a:t>
-            </a:r>
-            <a:endParaRPr lang="en-US" sz="1350" dirty="0"/>
-          </a:p>
-        </p:txBody>
-      </p:sp>
-      <p:sp>
-        <p:nvSpPr>
-          <p:cNvPr id="22" name="Shape 20"/>
-          <p:cNvSpPr/>
-          <p:nvPr/>
-        </p:nvSpPr>
-        <p:spPr>
-          <a:xfrm>
-            <a:off x="4178808" y="5806440"/>
-            <a:ext cx="3840480" cy="658368"/>
-          </a:xfrm>
-          <a:prstGeom prst="roundRect">
-            <a:avLst>
-              <a:gd name="adj" fmla="val 50000"/>
-            </a:avLst>
-          </a:prstGeom>
-          <a:solidFill>
-            <a:srgbClr val="10B981"/>
-          </a:solidFill>
-          <a:ln/>
-          <a:effectLst>
-            <a:outerShdw sx="100000" sy="100000" kx="0" ky="0" algn="bl" rotWithShape="0" blurRad="127000" dist="50800" dir="5400000">
-              <a:srgbClr val="000000">
-                <a:alpha val="45000"/>
-              </a:srgbClr>
-            </a:outerShdw>
-          </a:effectLst>
-        </p:spPr>
-      </p:sp>
-      <p:sp>
-        <p:nvSpPr>
-          <p:cNvPr id="23" name="Text 21"/>
-          <p:cNvSpPr/>
-          <p:nvPr/>
-        </p:nvSpPr>
-        <p:spPr>
-          <a:xfrm>
-            <a:off x="4178808" y="5806440"/>
-            <a:ext cx="3840480" cy="658368"/>
-          </a:xfrm>
-          <a:prstGeom prst="rect">
-            <a:avLst/>
-          </a:prstGeom>
-          <a:noFill/>
-          <a:ln/>
-        </p:spPr>
-        <p:txBody>
-          <a:bodyPr wrap="square" lIns="0" tIns="0" rIns="0" bIns="0" rtlCol="0" anchor="ctr"/>
-          <a:lstStyle/>
-          <a:p>
-            <a:pPr algn="ctr" indent="0" marL="0">
-              <a:buNone/>
-            </a:pPr>
-            <a:r>
-              <a:rPr lang="en-US" sz="1700" b="1" dirty="0">
-                <a:solidFill>
-                  <a:srgbClr val="062017"/>
-                </a:solidFill>
-                <a:latin typeface="Calibri" pitchFamily="34" charset="0"/>
-                <a:ea typeface="Calibri" pitchFamily="34" charset="-122"/>
-                <a:cs typeface="Calibri" pitchFamily="34" charset="-120"/>
+                <a:latin typeface="Pretendard" pitchFamily="34" charset="0"/>
+                <a:ea typeface="Pretendard" pitchFamily="34" charset="-122"/>
+                <a:cs typeface="Pretendard" pitchFamily="34" charset="-120"/>
               </a:rPr>
               <a:t>▶  지금부터 라이브 시연</a:t>
             </a:r>
-            <a:endParaRPr lang="en-US" sz="1700" dirty="0"/>
+            <a:endParaRPr lang="en-US" sz="1600" dirty="0"/>
           </a:p>
         </p:txBody>
       </p:sp>
@@ -2494,7 +2715,7 @@
     <p:bg>
       <p:bgPr>
         <a:solidFill>
-          <a:srgbClr val="0B0F17"/>
+          <a:srgbClr val="FFFFFF"/>
         </a:solidFill>
       </p:bgPr>
     </p:bg>
@@ -2520,105 +2741,226 @@
         </p:nvSpPr>
         <p:spPr>
           <a:xfrm>
-            <a:off x="640080" y="502920"/>
-            <a:ext cx="10972800" cy="640080"/>
-          </a:xfrm>
-          <a:prstGeom prst="rect">
-            <a:avLst/>
-          </a:prstGeom>
-          <a:noFill/>
-          <a:ln/>
-        </p:spPr>
-        <p:txBody>
-          <a:bodyPr wrap="square" lIns="0" tIns="0" rIns="0" bIns="0" rtlCol="0" anchor="ctr"/>
-          <a:lstStyle/>
-          <a:p>
-            <a:pPr indent="0" marL="0">
-              <a:buNone/>
-            </a:pPr>
-            <a:r>
-              <a:rPr lang="en-US" sz="3200" b="1" dirty="0">
-                <a:solidFill>
-                  <a:srgbClr val="FFFFFF"/>
-                </a:solidFill>
-                <a:latin typeface="Calibri" pitchFamily="34" charset="0"/>
-                <a:ea typeface="Calibri" pitchFamily="34" charset="-122"/>
-                <a:cs typeface="Calibri" pitchFamily="34" charset="-120"/>
+            <a:off x="457200" y="365760"/>
+            <a:ext cx="11277295" cy="274320"/>
+          </a:xfrm>
+          <a:prstGeom prst="rect">
+            <a:avLst/>
+          </a:prstGeom>
+          <a:noFill/>
+          <a:ln/>
+        </p:spPr>
+        <p:txBody>
+          <a:bodyPr wrap="square" lIns="0" tIns="0" rIns="0" bIns="0" rtlCol="0" anchor="ctr"/>
+          <a:lstStyle/>
+          <a:p>
+            <a:pPr indent="0" marL="0">
+              <a:buNone/>
+            </a:pPr>
+            <a:r>
+              <a:rPr lang="en-US" sz="1200" b="1" spc="100" kern="0" dirty="0">
+                <a:solidFill>
+                  <a:srgbClr val="8E8E93"/>
+                </a:solidFill>
+                <a:latin typeface="Pretendard" pitchFamily="34" charset="0"/>
+                <a:ea typeface="Pretendard" pitchFamily="34" charset="-122"/>
+                <a:cs typeface="Pretendard" pitchFamily="34" charset="-120"/>
+              </a:rPr>
+              <a:t>03  기술적 도전</a:t>
+            </a:r>
+            <a:endParaRPr lang="en-US" sz="1200" dirty="0"/>
+          </a:p>
+        </p:txBody>
+      </p:sp>
+      <p:sp>
+        <p:nvSpPr>
+          <p:cNvPr id="3" name="Text 1"/>
+          <p:cNvSpPr/>
+          <p:nvPr/>
+        </p:nvSpPr>
+        <p:spPr>
+          <a:xfrm>
+            <a:off x="457200" y="914400"/>
+            <a:ext cx="11277295" cy="685800"/>
+          </a:xfrm>
+          <a:prstGeom prst="rect">
+            <a:avLst/>
+          </a:prstGeom>
+          <a:noFill/>
+          <a:ln/>
+        </p:spPr>
+        <p:txBody>
+          <a:bodyPr wrap="square" lIns="0" tIns="0" rIns="0" bIns="0" rtlCol="0" anchor="ctr"/>
+          <a:lstStyle/>
+          <a:p>
+            <a:pPr indent="0" marL="0">
+              <a:lnSpc>
+                <a:spcPct val="120000"/>
+              </a:lnSpc>
+              <a:buNone/>
+            </a:pPr>
+            <a:r>
+              <a:rPr lang="en-US" sz="3400" b="1" dirty="0">
+                <a:solidFill>
+                  <a:srgbClr val="222222"/>
+                </a:solidFill>
+                <a:latin typeface="Pretendard" pitchFamily="34" charset="0"/>
+                <a:ea typeface="Pretendard" pitchFamily="34" charset="-122"/>
+                <a:cs typeface="Pretendard" pitchFamily="34" charset="-120"/>
               </a:rPr>
               <a:t>기술적 도전과 해결</a:t>
             </a:r>
-            <a:endParaRPr lang="en-US" sz="3200" dirty="0"/>
-          </a:p>
-        </p:txBody>
-      </p:sp>
-      <p:sp>
-        <p:nvSpPr>
-          <p:cNvPr id="3" name="Text 1"/>
-          <p:cNvSpPr/>
-          <p:nvPr/>
-        </p:nvSpPr>
-        <p:spPr>
-          <a:xfrm>
-            <a:off x="658368" y="1170432"/>
-            <a:ext cx="10972800" cy="365760"/>
-          </a:xfrm>
-          <a:prstGeom prst="rect">
-            <a:avLst/>
-          </a:prstGeom>
-          <a:noFill/>
-          <a:ln/>
-        </p:spPr>
-        <p:txBody>
-          <a:bodyPr wrap="square" lIns="0" tIns="0" rIns="0" bIns="0" rtlCol="0" anchor="ctr"/>
-          <a:lstStyle/>
-          <a:p>
-            <a:pPr indent="0" marL="0">
-              <a:buNone/>
-            </a:pPr>
-            <a:r>
-              <a:rPr lang="en-US" sz="1500" dirty="0">
-                <a:solidFill>
-                  <a:srgbClr val="9CA3AF"/>
-                </a:solidFill>
-                <a:latin typeface="Calibri" pitchFamily="34" charset="0"/>
-                <a:ea typeface="Calibri" pitchFamily="34" charset="-122"/>
-                <a:cs typeface="Calibri" pitchFamily="34" charset="-120"/>
-              </a:rPr>
-              <a:t>문제  →  해결</a:t>
-            </a:r>
-            <a:endParaRPr lang="en-US" sz="1500" dirty="0"/>
-          </a:p>
-        </p:txBody>
-      </p:sp>
-      <p:sp>
-        <p:nvSpPr>
-          <p:cNvPr id="4" name="Shape 2"/>
-          <p:cNvSpPr/>
-          <p:nvPr/>
-        </p:nvSpPr>
-        <p:spPr>
-          <a:xfrm>
-            <a:off x="640080" y="1828800"/>
-            <a:ext cx="5327752" cy="2084832"/>
-          </a:xfrm>
-          <a:prstGeom prst="roundRect">
-            <a:avLst>
-              <a:gd name="adj" fmla="val 4386"/>
-            </a:avLst>
-          </a:prstGeom>
-          <a:solidFill>
-            <a:srgbClr val="161D29"/>
+            <a:endParaRPr lang="en-US" sz="3400" dirty="0"/>
+          </a:p>
+        </p:txBody>
+      </p:sp>
+      <p:sp>
+        <p:nvSpPr>
+          <p:cNvPr id="4" name="Text 2"/>
+          <p:cNvSpPr/>
+          <p:nvPr/>
+        </p:nvSpPr>
+        <p:spPr>
+          <a:xfrm>
+            <a:off x="457200" y="1490472"/>
+            <a:ext cx="11277295" cy="457200"/>
+          </a:xfrm>
+          <a:prstGeom prst="rect">
+            <a:avLst/>
+          </a:prstGeom>
+          <a:noFill/>
+          <a:ln/>
+        </p:spPr>
+        <p:txBody>
+          <a:bodyPr wrap="square" lIns="0" tIns="0" rIns="0" bIns="0" rtlCol="0" anchor="ctr"/>
+          <a:lstStyle/>
+          <a:p>
+            <a:pPr indent="0" marL="0">
+              <a:lnSpc>
+                <a:spcPct val="145000"/>
+              </a:lnSpc>
+              <a:buNone/>
+            </a:pPr>
+            <a:r>
+              <a:rPr lang="en-US" sz="1600" dirty="0">
+                <a:solidFill>
+                  <a:srgbClr val="45515E"/>
+                </a:solidFill>
+                <a:latin typeface="Pretendard" pitchFamily="34" charset="0"/>
+                <a:ea typeface="Pretendard" pitchFamily="34" charset="-122"/>
+                <a:cs typeface="Pretendard" pitchFamily="34" charset="-120"/>
+              </a:rPr>
+              <a:t>문제 → 해결</a:t>
+            </a:r>
+            <a:endParaRPr lang="en-US" sz="1600" dirty="0"/>
+          </a:p>
+        </p:txBody>
+      </p:sp>
+      <p:sp>
+        <p:nvSpPr>
+          <p:cNvPr id="5" name="Text 3"/>
+          <p:cNvSpPr/>
+          <p:nvPr/>
+        </p:nvSpPr>
+        <p:spPr>
+          <a:xfrm>
+            <a:off x="457200" y="6446520"/>
+            <a:ext cx="2743200" cy="228600"/>
+          </a:xfrm>
+          <a:prstGeom prst="rect">
+            <a:avLst/>
+          </a:prstGeom>
+          <a:noFill/>
+          <a:ln/>
+        </p:spPr>
+        <p:txBody>
+          <a:bodyPr wrap="square" lIns="0" tIns="0" rIns="0" bIns="0" rtlCol="0" anchor="ctr"/>
+          <a:lstStyle/>
+          <a:p>
+            <a:pPr indent="0" marL="0">
+              <a:buNone/>
+            </a:pPr>
+            <a:r>
+              <a:rPr lang="en-US" sz="1000" dirty="0">
+                <a:solidFill>
+                  <a:srgbClr val="8E8E93"/>
+                </a:solidFill>
+                <a:latin typeface="Pretendard" pitchFamily="34" charset="0"/>
+                <a:ea typeface="Pretendard" pitchFamily="34" charset="-122"/>
+                <a:cs typeface="Pretendard" pitchFamily="34" charset="-120"/>
+              </a:rPr>
+              <a:t>3</a:t>
+            </a:r>
+            <a:endParaRPr lang="en-US" sz="1000" dirty="0"/>
+          </a:p>
+        </p:txBody>
+      </p:sp>
+      <p:sp>
+        <p:nvSpPr>
+          <p:cNvPr id="6" name="Text 4"/>
+          <p:cNvSpPr/>
+          <p:nvPr/>
+        </p:nvSpPr>
+        <p:spPr>
+          <a:xfrm>
+            <a:off x="5333695" y="6446520"/>
+            <a:ext cx="6400800" cy="228600"/>
+          </a:xfrm>
+          <a:prstGeom prst="rect">
+            <a:avLst/>
+          </a:prstGeom>
+          <a:noFill/>
+          <a:ln/>
+        </p:spPr>
+        <p:txBody>
+          <a:bodyPr wrap="square" lIns="0" tIns="0" rIns="0" bIns="0" rtlCol="0" anchor="ctr"/>
+          <a:lstStyle/>
+          <a:p>
+            <a:pPr algn="r" indent="0" marL="0">
+              <a:buNone/>
+            </a:pPr>
+            <a:r>
+              <a:rPr lang="en-US" sz="900" dirty="0">
+                <a:solidFill>
+                  <a:srgbClr val="8E8E93"/>
+                </a:solidFill>
+                <a:latin typeface="Pretendard" pitchFamily="34" charset="0"/>
+                <a:ea typeface="Pretendard" pitchFamily="34" charset="-122"/>
+                <a:cs typeface="Pretendard" pitchFamily="34" charset="-120"/>
+              </a:rPr>
+              <a:t>team-16-project · 2026 전기차 보조금 상담 AI</a:t>
+            </a:r>
+            <a:endParaRPr lang="en-US" sz="900" dirty="0"/>
+          </a:p>
+        </p:txBody>
+      </p:sp>
+      <p:sp>
+        <p:nvSpPr>
+          <p:cNvPr id="7" name="Shape 5"/>
+          <p:cNvSpPr/>
+          <p:nvPr/>
+        </p:nvSpPr>
+        <p:spPr>
+          <a:xfrm>
+            <a:off x="457200" y="2331720"/>
+            <a:ext cx="5501488" cy="1737360"/>
+          </a:xfrm>
+          <a:prstGeom prst="rect">
+            <a:avLst/>
+          </a:prstGeom>
+          <a:solidFill>
+            <a:srgbClr val="FFFFFF"/>
           </a:solidFill>
           <a:ln w="12700">
             <a:solidFill>
-              <a:srgbClr val="26303F"/>
+              <a:srgbClr val="E5E7EB"/>
             </a:solidFill>
             <a:prstDash val="solid"/>
           </a:ln>
           <a:effectLst>
-            <a:outerShdw sx="100000" sy="100000" kx="0" ky="0" algn="bl" rotWithShape="0" blurRad="127000" dist="50800" dir="5400000">
+            <a:outerShdw sx="100000" sy="100000" kx="0" ky="0" algn="bl" rotWithShape="0" blurRad="76200" dist="50800" dir="5400000">
               <a:srgbClr val="000000">
-                <a:alpha val="45000"/>
+                <a:alpha val="8000"/>
               </a:srgbClr>
             </a:outerShdw>
           </a:effectLst>
@@ -2626,75 +2968,98 @@
       </p:sp>
       <p:sp>
         <p:nvSpPr>
-          <p:cNvPr id="5" name="Text 3"/>
-          <p:cNvSpPr/>
-          <p:nvPr/>
-        </p:nvSpPr>
-        <p:spPr>
-          <a:xfrm>
-            <a:off x="960120" y="2121408"/>
-            <a:ext cx="868680" cy="640080"/>
-          </a:xfrm>
-          <a:prstGeom prst="rect">
-            <a:avLst/>
-          </a:prstGeom>
-          <a:noFill/>
-          <a:ln/>
-        </p:spPr>
-        <p:txBody>
-          <a:bodyPr wrap="square" lIns="0" tIns="0" rIns="0" bIns="0" rtlCol="0" anchor="ctr"/>
-          <a:lstStyle/>
-          <a:p>
-            <a:pPr indent="0" marL="0">
-              <a:buNone/>
-            </a:pPr>
-            <a:r>
-              <a:rPr lang="en-US" sz="3000" b="1" dirty="0">
-                <a:solidFill>
-                  <a:srgbClr val="10B981"/>
-                </a:solidFill>
-                <a:latin typeface="Calibri" pitchFamily="34" charset="0"/>
-                <a:ea typeface="Calibri" pitchFamily="34" charset="-122"/>
-                <a:cs typeface="Calibri" pitchFamily="34" charset="-120"/>
+          <p:cNvPr id="8" name="Shape 6"/>
+          <p:cNvSpPr/>
+          <p:nvPr/>
+        </p:nvSpPr>
+        <p:spPr>
+          <a:xfrm>
+            <a:off x="731520" y="2606040"/>
+            <a:ext cx="640080" cy="640080"/>
+          </a:xfrm>
+          <a:prstGeom prst="rect">
+            <a:avLst/>
+          </a:prstGeom>
+          <a:solidFill>
+            <a:srgbClr val="1456F0"/>
+          </a:solidFill>
+          <a:ln/>
+        </p:spPr>
+      </p:sp>
+      <p:sp>
+        <p:nvSpPr>
+          <p:cNvPr id="9" name="Text 7"/>
+          <p:cNvSpPr/>
+          <p:nvPr/>
+        </p:nvSpPr>
+        <p:spPr>
+          <a:xfrm>
+            <a:off x="731520" y="2606040"/>
+            <a:ext cx="640080" cy="640080"/>
+          </a:xfrm>
+          <a:prstGeom prst="rect">
+            <a:avLst/>
+          </a:prstGeom>
+          <a:noFill/>
+          <a:ln/>
+        </p:spPr>
+        <p:txBody>
+          <a:bodyPr wrap="square" lIns="0" tIns="0" rIns="0" bIns="0" rtlCol="0" anchor="ctr"/>
+          <a:lstStyle/>
+          <a:p>
+            <a:pPr algn="ctr" indent="0" marL="0">
+              <a:buNone/>
+            </a:pPr>
+            <a:r>
+              <a:rPr lang="en-US" sz="1800" b="1" dirty="0">
+                <a:solidFill>
+                  <a:srgbClr val="FFFFFF"/>
+                </a:solidFill>
+                <a:latin typeface="Pretendard" pitchFamily="34" charset="0"/>
+                <a:ea typeface="Pretendard" pitchFamily="34" charset="-122"/>
+                <a:cs typeface="Pretendard" pitchFamily="34" charset="-120"/>
               </a:rPr>
               <a:t>01</a:t>
             </a:r>
-            <a:endParaRPr lang="en-US" sz="3000" dirty="0"/>
-          </a:p>
-        </p:txBody>
-      </p:sp>
-      <p:sp>
-        <p:nvSpPr>
-          <p:cNvPr id="6" name="Text 4"/>
-          <p:cNvSpPr/>
-          <p:nvPr/>
-        </p:nvSpPr>
-        <p:spPr>
-          <a:xfrm>
-            <a:off x="1874520" y="2139696"/>
-            <a:ext cx="3773272" cy="731520"/>
-          </a:xfrm>
-          <a:prstGeom prst="rect">
-            <a:avLst/>
-          </a:prstGeom>
-          <a:noFill/>
-          <a:ln/>
-        </p:spPr>
-        <p:txBody>
-          <a:bodyPr wrap="square" lIns="0" tIns="0" rIns="0" bIns="0" rtlCol="0" anchor="ctr"/>
-          <a:lstStyle/>
-          <a:p>
-            <a:pPr indent="0" marL="0">
+            <a:endParaRPr lang="en-US" sz="1800" dirty="0"/>
+          </a:p>
+        </p:txBody>
+      </p:sp>
+      <p:sp>
+        <p:nvSpPr>
+          <p:cNvPr id="10" name="Text 8"/>
+          <p:cNvSpPr/>
+          <p:nvPr/>
+        </p:nvSpPr>
+        <p:spPr>
+          <a:xfrm>
+            <a:off x="1554480" y="2606040"/>
+            <a:ext cx="4129888" cy="640080"/>
+          </a:xfrm>
+          <a:prstGeom prst="rect">
+            <a:avLst/>
+          </a:prstGeom>
+          <a:noFill/>
+          <a:ln/>
+        </p:spPr>
+        <p:txBody>
+          <a:bodyPr wrap="square" lIns="0" tIns="0" rIns="0" bIns="0" rtlCol="0" anchor="ctr"/>
+          <a:lstStyle/>
+          <a:p>
+            <a:pPr indent="0" marL="0">
+              <a:lnSpc>
+                <a:spcPct val="115000"/>
+              </a:lnSpc>
               <a:buNone/>
             </a:pPr>
             <a:r>
               <a:rPr lang="en-US" sz="1700" b="1" dirty="0">
                 <a:solidFill>
-                  <a:srgbClr val="FFFFFF"/>
-                </a:solidFill>
-                <a:latin typeface="Calibri" pitchFamily="34" charset="0"/>
-                <a:ea typeface="Calibri" pitchFamily="34" charset="-122"/>
-                <a:cs typeface="Calibri" pitchFamily="34" charset="-120"/>
+                  <a:srgbClr val="222222"/>
+                </a:solidFill>
+                <a:latin typeface="Pretendard" pitchFamily="34" charset="0"/>
+                <a:ea typeface="Pretendard" pitchFamily="34" charset="-122"/>
+                <a:cs typeface="Pretendard" pitchFamily="34" charset="-120"/>
               </a:rPr>
               <a:t>금액 환각(hallucination) 방지</a:t>
             </a:r>
@@ -2704,14 +3069,14 @@
       </p:sp>
       <p:sp>
         <p:nvSpPr>
-          <p:cNvPr id="7" name="Text 5"/>
-          <p:cNvSpPr/>
-          <p:nvPr/>
-        </p:nvSpPr>
-        <p:spPr>
-          <a:xfrm>
-            <a:off x="987552" y="2907792"/>
-            <a:ext cx="4641952" cy="868680"/>
+          <p:cNvPr id="11" name="Text 9"/>
+          <p:cNvSpPr/>
+          <p:nvPr/>
+        </p:nvSpPr>
+        <p:spPr>
+          <a:xfrm>
+            <a:off x="731520" y="3355848"/>
+            <a:ext cx="4952848" cy="621792"/>
           </a:xfrm>
           <a:prstGeom prst="rect">
             <a:avLst/>
@@ -2725,54 +3090,52 @@
           <a:p>
             <a:pPr indent="0" marL="0">
               <a:lnSpc>
-                <a:spcPct val="122000"/>
+                <a:spcPct val="140000"/>
               </a:lnSpc>
               <a:buNone/>
             </a:pPr>
             <a:r>
-              <a:rPr lang="en-US" sz="1300" dirty="0">
-                <a:solidFill>
-                  <a:srgbClr val="9CA3AF"/>
-                </a:solidFill>
-                <a:latin typeface="Calibri" pitchFamily="34" charset="0"/>
-                <a:ea typeface="Calibri" pitchFamily="34" charset="-122"/>
-                <a:cs typeface="Calibri" pitchFamily="34" charset="-120"/>
+              <a:rPr lang="en-US" sz="1250" dirty="0">
+                <a:solidFill>
+                  <a:srgbClr val="45515E"/>
+                </a:solidFill>
+                <a:latin typeface="Pretendard" pitchFamily="34" charset="0"/>
+                <a:ea typeface="Pretendard" pitchFamily="34" charset="-122"/>
+                <a:cs typeface="Pretendard" pitchFamily="34" charset="-120"/>
               </a:rPr>
               <a:t>LLM이 금액을 생성하면 틀림. 금액은 CSV 조회값만 사용하고, LLM은 '왜 그 금액인지'만 설명하도록 역할을 분리.</a:t>
             </a:r>
-            <a:endParaRPr lang="en-US" sz="1300" dirty="0"/>
-          </a:p>
-        </p:txBody>
-      </p:sp>
-      <p:sp>
-        <p:nvSpPr>
-          <p:cNvPr id="8" name="Shape 6"/>
-          <p:cNvSpPr/>
-          <p:nvPr/>
-        </p:nvSpPr>
-        <p:spPr>
-          <a:xfrm>
-            <a:off x="6223864" y="1828800"/>
-            <a:ext cx="5327752" cy="2084832"/>
-          </a:xfrm>
-          <a:prstGeom prst="roundRect">
-            <a:avLst>
-              <a:gd name="adj" fmla="val 4386"/>
-            </a:avLst>
-          </a:prstGeom>
-          <a:solidFill>
-            <a:srgbClr val="161D29"/>
+            <a:endParaRPr lang="en-US" sz="1250" dirty="0"/>
+          </a:p>
+        </p:txBody>
+      </p:sp>
+      <p:sp>
+        <p:nvSpPr>
+          <p:cNvPr id="12" name="Shape 10"/>
+          <p:cNvSpPr/>
+          <p:nvPr/>
+        </p:nvSpPr>
+        <p:spPr>
+          <a:xfrm>
+            <a:off x="6233008" y="2331720"/>
+            <a:ext cx="5501488" cy="1737360"/>
+          </a:xfrm>
+          <a:prstGeom prst="rect">
+            <a:avLst/>
+          </a:prstGeom>
+          <a:solidFill>
+            <a:srgbClr val="FFFFFF"/>
           </a:solidFill>
           <a:ln w="12700">
             <a:solidFill>
-              <a:srgbClr val="26303F"/>
+              <a:srgbClr val="E5E7EB"/>
             </a:solidFill>
             <a:prstDash val="solid"/>
           </a:ln>
           <a:effectLst>
-            <a:outerShdw sx="100000" sy="100000" kx="0" ky="0" algn="bl" rotWithShape="0" blurRad="127000" dist="50800" dir="5400000">
+            <a:outerShdw sx="100000" sy="100000" kx="0" ky="0" algn="bl" rotWithShape="0" blurRad="76200" dist="50800" dir="5400000">
               <a:srgbClr val="000000">
-                <a:alpha val="45000"/>
+                <a:alpha val="8000"/>
               </a:srgbClr>
             </a:outerShdw>
           </a:effectLst>
@@ -2780,75 +3143,98 @@
       </p:sp>
       <p:sp>
         <p:nvSpPr>
-          <p:cNvPr id="9" name="Text 7"/>
-          <p:cNvSpPr/>
-          <p:nvPr/>
-        </p:nvSpPr>
-        <p:spPr>
-          <a:xfrm>
-            <a:off x="6543904" y="2121408"/>
-            <a:ext cx="868680" cy="640080"/>
-          </a:xfrm>
-          <a:prstGeom prst="rect">
-            <a:avLst/>
-          </a:prstGeom>
-          <a:noFill/>
-          <a:ln/>
-        </p:spPr>
-        <p:txBody>
-          <a:bodyPr wrap="square" lIns="0" tIns="0" rIns="0" bIns="0" rtlCol="0" anchor="ctr"/>
-          <a:lstStyle/>
-          <a:p>
-            <a:pPr indent="0" marL="0">
-              <a:buNone/>
-            </a:pPr>
-            <a:r>
-              <a:rPr lang="en-US" sz="3000" b="1" dirty="0">
-                <a:solidFill>
-                  <a:srgbClr val="10B981"/>
-                </a:solidFill>
-                <a:latin typeface="Calibri" pitchFamily="34" charset="0"/>
-                <a:ea typeface="Calibri" pitchFamily="34" charset="-122"/>
-                <a:cs typeface="Calibri" pitchFamily="34" charset="-120"/>
+          <p:cNvPr id="13" name="Shape 11"/>
+          <p:cNvSpPr/>
+          <p:nvPr/>
+        </p:nvSpPr>
+        <p:spPr>
+          <a:xfrm>
+            <a:off x="6507328" y="2606040"/>
+            <a:ext cx="640080" cy="640080"/>
+          </a:xfrm>
+          <a:prstGeom prst="rect">
+            <a:avLst/>
+          </a:prstGeom>
+          <a:solidFill>
+            <a:srgbClr val="1456F0"/>
+          </a:solidFill>
+          <a:ln/>
+        </p:spPr>
+      </p:sp>
+      <p:sp>
+        <p:nvSpPr>
+          <p:cNvPr id="14" name="Text 12"/>
+          <p:cNvSpPr/>
+          <p:nvPr/>
+        </p:nvSpPr>
+        <p:spPr>
+          <a:xfrm>
+            <a:off x="6507328" y="2606040"/>
+            <a:ext cx="640080" cy="640080"/>
+          </a:xfrm>
+          <a:prstGeom prst="rect">
+            <a:avLst/>
+          </a:prstGeom>
+          <a:noFill/>
+          <a:ln/>
+        </p:spPr>
+        <p:txBody>
+          <a:bodyPr wrap="square" lIns="0" tIns="0" rIns="0" bIns="0" rtlCol="0" anchor="ctr"/>
+          <a:lstStyle/>
+          <a:p>
+            <a:pPr algn="ctr" indent="0" marL="0">
+              <a:buNone/>
+            </a:pPr>
+            <a:r>
+              <a:rPr lang="en-US" sz="1800" b="1" dirty="0">
+                <a:solidFill>
+                  <a:srgbClr val="FFFFFF"/>
+                </a:solidFill>
+                <a:latin typeface="Pretendard" pitchFamily="34" charset="0"/>
+                <a:ea typeface="Pretendard" pitchFamily="34" charset="-122"/>
+                <a:cs typeface="Pretendard" pitchFamily="34" charset="-120"/>
               </a:rPr>
               <a:t>02</a:t>
             </a:r>
-            <a:endParaRPr lang="en-US" sz="3000" dirty="0"/>
-          </a:p>
-        </p:txBody>
-      </p:sp>
-      <p:sp>
-        <p:nvSpPr>
-          <p:cNvPr id="10" name="Text 8"/>
-          <p:cNvSpPr/>
-          <p:nvPr/>
-        </p:nvSpPr>
-        <p:spPr>
-          <a:xfrm>
-            <a:off x="7458304" y="2139696"/>
-            <a:ext cx="3773272" cy="731520"/>
-          </a:xfrm>
-          <a:prstGeom prst="rect">
-            <a:avLst/>
-          </a:prstGeom>
-          <a:noFill/>
-          <a:ln/>
-        </p:spPr>
-        <p:txBody>
-          <a:bodyPr wrap="square" lIns="0" tIns="0" rIns="0" bIns="0" rtlCol="0" anchor="ctr"/>
-          <a:lstStyle/>
-          <a:p>
-            <a:pPr indent="0" marL="0">
+            <a:endParaRPr lang="en-US" sz="1800" dirty="0"/>
+          </a:p>
+        </p:txBody>
+      </p:sp>
+      <p:sp>
+        <p:nvSpPr>
+          <p:cNvPr id="15" name="Text 13"/>
+          <p:cNvSpPr/>
+          <p:nvPr/>
+        </p:nvSpPr>
+        <p:spPr>
+          <a:xfrm>
+            <a:off x="7330288" y="2606040"/>
+            <a:ext cx="4129888" cy="640080"/>
+          </a:xfrm>
+          <a:prstGeom prst="rect">
+            <a:avLst/>
+          </a:prstGeom>
+          <a:noFill/>
+          <a:ln/>
+        </p:spPr>
+        <p:txBody>
+          <a:bodyPr wrap="square" lIns="0" tIns="0" rIns="0" bIns="0" rtlCol="0" anchor="ctr"/>
+          <a:lstStyle/>
+          <a:p>
+            <a:pPr indent="0" marL="0">
+              <a:lnSpc>
+                <a:spcPct val="115000"/>
+              </a:lnSpc>
               <a:buNone/>
             </a:pPr>
             <a:r>
               <a:rPr lang="en-US" sz="1700" b="1" dirty="0">
                 <a:solidFill>
-                  <a:srgbClr val="FFFFFF"/>
-                </a:solidFill>
-                <a:latin typeface="Calibri" pitchFamily="34" charset="0"/>
-                <a:ea typeface="Calibri" pitchFamily="34" charset="-122"/>
-                <a:cs typeface="Calibri" pitchFamily="34" charset="-120"/>
+                  <a:srgbClr val="222222"/>
+                </a:solidFill>
+                <a:latin typeface="Pretendard" pitchFamily="34" charset="0"/>
+                <a:ea typeface="Pretendard" pitchFamily="34" charset="-122"/>
+                <a:cs typeface="Pretendard" pitchFamily="34" charset="-120"/>
               </a:rPr>
               <a:t>LLM 이중화 + 폴백</a:t>
             </a:r>
@@ -2858,14 +3244,14 @@
       </p:sp>
       <p:sp>
         <p:nvSpPr>
-          <p:cNvPr id="11" name="Text 9"/>
-          <p:cNvSpPr/>
-          <p:nvPr/>
-        </p:nvSpPr>
-        <p:spPr>
-          <a:xfrm>
-            <a:off x="6571336" y="2907792"/>
-            <a:ext cx="4641952" cy="868680"/>
+          <p:cNvPr id="16" name="Text 14"/>
+          <p:cNvSpPr/>
+          <p:nvPr/>
+        </p:nvSpPr>
+        <p:spPr>
+          <a:xfrm>
+            <a:off x="6507328" y="3355848"/>
+            <a:ext cx="4952848" cy="621792"/>
           </a:xfrm>
           <a:prstGeom prst="rect">
             <a:avLst/>
@@ -2879,54 +3265,52 @@
           <a:p>
             <a:pPr indent="0" marL="0">
               <a:lnSpc>
-                <a:spcPct val="122000"/>
+                <a:spcPct val="140000"/>
               </a:lnSpc>
               <a:buNone/>
             </a:pPr>
             <a:r>
-              <a:rPr lang="en-US" sz="1300" dirty="0">
-                <a:solidFill>
-                  <a:srgbClr val="9CA3AF"/>
-                </a:solidFill>
-                <a:latin typeface="Calibri" pitchFamily="34" charset="0"/>
-                <a:ea typeface="Calibri" pitchFamily="34" charset="-122"/>
-                <a:cs typeface="Calibri" pitchFamily="34" charset="-120"/>
+              <a:rPr lang="en-US" sz="1250" dirty="0">
+                <a:solidFill>
+                  <a:srgbClr val="45515E"/>
+                </a:solidFill>
+                <a:latin typeface="Pretendard" pitchFamily="34" charset="0"/>
+                <a:ea typeface="Pretendard" pitchFamily="34" charset="-122"/>
+                <a:cs typeface="Pretendard" pitchFamily="34" charset="-120"/>
               </a:rPr>
               <a:t>Upstage Solar API를 기본으로, 키가 없으면 로컬 모델로 자동 전환. 팀원마다 다른 환경에서도 동작.</a:t>
             </a:r>
-            <a:endParaRPr lang="en-US" sz="1300" dirty="0"/>
-          </a:p>
-        </p:txBody>
-      </p:sp>
-      <p:sp>
-        <p:nvSpPr>
-          <p:cNvPr id="12" name="Shape 10"/>
-          <p:cNvSpPr/>
-          <p:nvPr/>
-        </p:nvSpPr>
-        <p:spPr>
-          <a:xfrm>
-            <a:off x="640080" y="4169664"/>
-            <a:ext cx="5327752" cy="2084832"/>
-          </a:xfrm>
-          <a:prstGeom prst="roundRect">
-            <a:avLst>
-              <a:gd name="adj" fmla="val 4386"/>
-            </a:avLst>
-          </a:prstGeom>
-          <a:solidFill>
-            <a:srgbClr val="161D29"/>
+            <a:endParaRPr lang="en-US" sz="1250" dirty="0"/>
+          </a:p>
+        </p:txBody>
+      </p:sp>
+      <p:sp>
+        <p:nvSpPr>
+          <p:cNvPr id="17" name="Shape 15"/>
+          <p:cNvSpPr/>
+          <p:nvPr/>
+        </p:nvSpPr>
+        <p:spPr>
+          <a:xfrm>
+            <a:off x="457200" y="4297680"/>
+            <a:ext cx="5501488" cy="1737360"/>
+          </a:xfrm>
+          <a:prstGeom prst="rect">
+            <a:avLst/>
+          </a:prstGeom>
+          <a:solidFill>
+            <a:srgbClr val="FFFFFF"/>
           </a:solidFill>
           <a:ln w="12700">
             <a:solidFill>
-              <a:srgbClr val="26303F"/>
+              <a:srgbClr val="E5E7EB"/>
             </a:solidFill>
             <a:prstDash val="solid"/>
           </a:ln>
           <a:effectLst>
-            <a:outerShdw sx="100000" sy="100000" kx="0" ky="0" algn="bl" rotWithShape="0" blurRad="127000" dist="50800" dir="5400000">
+            <a:outerShdw sx="100000" sy="100000" kx="0" ky="0" algn="bl" rotWithShape="0" blurRad="76200" dist="50800" dir="5400000">
               <a:srgbClr val="000000">
-                <a:alpha val="45000"/>
+                <a:alpha val="8000"/>
               </a:srgbClr>
             </a:outerShdw>
           </a:effectLst>
@@ -2934,75 +3318,98 @@
       </p:sp>
       <p:sp>
         <p:nvSpPr>
-          <p:cNvPr id="13" name="Text 11"/>
-          <p:cNvSpPr/>
-          <p:nvPr/>
-        </p:nvSpPr>
-        <p:spPr>
-          <a:xfrm>
-            <a:off x="960120" y="4462272"/>
-            <a:ext cx="868680" cy="640080"/>
-          </a:xfrm>
-          <a:prstGeom prst="rect">
-            <a:avLst/>
-          </a:prstGeom>
-          <a:noFill/>
-          <a:ln/>
-        </p:spPr>
-        <p:txBody>
-          <a:bodyPr wrap="square" lIns="0" tIns="0" rIns="0" bIns="0" rtlCol="0" anchor="ctr"/>
-          <a:lstStyle/>
-          <a:p>
-            <a:pPr indent="0" marL="0">
-              <a:buNone/>
-            </a:pPr>
-            <a:r>
-              <a:rPr lang="en-US" sz="3000" b="1" dirty="0">
-                <a:solidFill>
-                  <a:srgbClr val="10B981"/>
-                </a:solidFill>
-                <a:latin typeface="Calibri" pitchFamily="34" charset="0"/>
-                <a:ea typeface="Calibri" pitchFamily="34" charset="-122"/>
-                <a:cs typeface="Calibri" pitchFamily="34" charset="-120"/>
+          <p:cNvPr id="18" name="Shape 16"/>
+          <p:cNvSpPr/>
+          <p:nvPr/>
+        </p:nvSpPr>
+        <p:spPr>
+          <a:xfrm>
+            <a:off x="731520" y="4572000"/>
+            <a:ext cx="640080" cy="640080"/>
+          </a:xfrm>
+          <a:prstGeom prst="rect">
+            <a:avLst/>
+          </a:prstGeom>
+          <a:solidFill>
+            <a:srgbClr val="1456F0"/>
+          </a:solidFill>
+          <a:ln/>
+        </p:spPr>
+      </p:sp>
+      <p:sp>
+        <p:nvSpPr>
+          <p:cNvPr id="19" name="Text 17"/>
+          <p:cNvSpPr/>
+          <p:nvPr/>
+        </p:nvSpPr>
+        <p:spPr>
+          <a:xfrm>
+            <a:off x="731520" y="4572000"/>
+            <a:ext cx="640080" cy="640080"/>
+          </a:xfrm>
+          <a:prstGeom prst="rect">
+            <a:avLst/>
+          </a:prstGeom>
+          <a:noFill/>
+          <a:ln/>
+        </p:spPr>
+        <p:txBody>
+          <a:bodyPr wrap="square" lIns="0" tIns="0" rIns="0" bIns="0" rtlCol="0" anchor="ctr"/>
+          <a:lstStyle/>
+          <a:p>
+            <a:pPr algn="ctr" indent="0" marL="0">
+              <a:buNone/>
+            </a:pPr>
+            <a:r>
+              <a:rPr lang="en-US" sz="1800" b="1" dirty="0">
+                <a:solidFill>
+                  <a:srgbClr val="FFFFFF"/>
+                </a:solidFill>
+                <a:latin typeface="Pretendard" pitchFamily="34" charset="0"/>
+                <a:ea typeface="Pretendard" pitchFamily="34" charset="-122"/>
+                <a:cs typeface="Pretendard" pitchFamily="34" charset="-120"/>
               </a:rPr>
               <a:t>03</a:t>
             </a:r>
-            <a:endParaRPr lang="en-US" sz="3000" dirty="0"/>
-          </a:p>
-        </p:txBody>
-      </p:sp>
-      <p:sp>
-        <p:nvSpPr>
-          <p:cNvPr id="14" name="Text 12"/>
-          <p:cNvSpPr/>
-          <p:nvPr/>
-        </p:nvSpPr>
-        <p:spPr>
-          <a:xfrm>
-            <a:off x="1874520" y="4480560"/>
-            <a:ext cx="3773272" cy="731520"/>
-          </a:xfrm>
-          <a:prstGeom prst="rect">
-            <a:avLst/>
-          </a:prstGeom>
-          <a:noFill/>
-          <a:ln/>
-        </p:spPr>
-        <p:txBody>
-          <a:bodyPr wrap="square" lIns="0" tIns="0" rIns="0" bIns="0" rtlCol="0" anchor="ctr"/>
-          <a:lstStyle/>
-          <a:p>
-            <a:pPr indent="0" marL="0">
+            <a:endParaRPr lang="en-US" sz="1800" dirty="0"/>
+          </a:p>
+        </p:txBody>
+      </p:sp>
+      <p:sp>
+        <p:nvSpPr>
+          <p:cNvPr id="20" name="Text 18"/>
+          <p:cNvSpPr/>
+          <p:nvPr/>
+        </p:nvSpPr>
+        <p:spPr>
+          <a:xfrm>
+            <a:off x="1554480" y="4572000"/>
+            <a:ext cx="4129888" cy="640080"/>
+          </a:xfrm>
+          <a:prstGeom prst="rect">
+            <a:avLst/>
+          </a:prstGeom>
+          <a:noFill/>
+          <a:ln/>
+        </p:spPr>
+        <p:txBody>
+          <a:bodyPr wrap="square" lIns="0" tIns="0" rIns="0" bIns="0" rtlCol="0" anchor="ctr"/>
+          <a:lstStyle/>
+          <a:p>
+            <a:pPr indent="0" marL="0">
+              <a:lnSpc>
+                <a:spcPct val="115000"/>
+              </a:lnSpc>
               <a:buNone/>
             </a:pPr>
             <a:r>
               <a:rPr lang="en-US" sz="1700" b="1" dirty="0">
                 <a:solidFill>
-                  <a:srgbClr val="FFFFFF"/>
-                </a:solidFill>
-                <a:latin typeface="Calibri" pitchFamily="34" charset="0"/>
-                <a:ea typeface="Calibri" pitchFamily="34" charset="-122"/>
-                <a:cs typeface="Calibri" pitchFamily="34" charset="-120"/>
+                  <a:srgbClr val="222222"/>
+                </a:solidFill>
+                <a:latin typeface="Pretendard" pitchFamily="34" charset="0"/>
+                <a:ea typeface="Pretendard" pitchFamily="34" charset="-122"/>
+                <a:cs typeface="Pretendard" pitchFamily="34" charset="-120"/>
               </a:rPr>
               <a:t>ESM 라이브러리 빌드 충돌</a:t>
             </a:r>
@@ -3012,14 +3419,14 @@
       </p:sp>
       <p:sp>
         <p:nvSpPr>
-          <p:cNvPr id="15" name="Text 13"/>
-          <p:cNvSpPr/>
-          <p:nvPr/>
-        </p:nvSpPr>
-        <p:spPr>
-          <a:xfrm>
-            <a:off x="987552" y="5248656"/>
-            <a:ext cx="4641952" cy="868680"/>
+          <p:cNvPr id="21" name="Text 19"/>
+          <p:cNvSpPr/>
+          <p:nvPr/>
+        </p:nvSpPr>
+        <p:spPr>
+          <a:xfrm>
+            <a:off x="731520" y="5321808"/>
+            <a:ext cx="4952848" cy="621792"/>
           </a:xfrm>
           <a:prstGeom prst="rect">
             <a:avLst/>
@@ -3033,54 +3440,52 @@
           <a:p>
             <a:pPr indent="0" marL="0">
               <a:lnSpc>
-                <a:spcPct val="122000"/>
+                <a:spcPct val="140000"/>
               </a:lnSpc>
               <a:buNone/>
             </a:pPr>
             <a:r>
-              <a:rPr lang="en-US" sz="1300" dirty="0">
-                <a:solidFill>
-                  <a:srgbClr val="9CA3AF"/>
-                </a:solidFill>
-                <a:latin typeface="Calibri" pitchFamily="34" charset="0"/>
-                <a:ea typeface="Calibri" pitchFamily="34" charset="-122"/>
-                <a:cs typeface="Calibri" pitchFamily="34" charset="-120"/>
+              <a:rPr lang="en-US" sz="1250" dirty="0">
+                <a:solidFill>
+                  <a:srgbClr val="45515E"/>
+                </a:solidFill>
+                <a:latin typeface="Pretendard" pitchFamily="34" charset="0"/>
+                <a:ea typeface="Pretendard" pitchFamily="34" charset="-122"/>
+                <a:cs typeface="Pretendard" pitchFamily="34" charset="-120"/>
               </a:rPr>
               <a:t>react-simple-maps·d3가 Next에서 빌드 크래시. next.config의 transpilePackages로 트랜스파일해 해결.</a:t>
             </a:r>
-            <a:endParaRPr lang="en-US" sz="1300" dirty="0"/>
-          </a:p>
-        </p:txBody>
-      </p:sp>
-      <p:sp>
-        <p:nvSpPr>
-          <p:cNvPr id="16" name="Shape 14"/>
-          <p:cNvSpPr/>
-          <p:nvPr/>
-        </p:nvSpPr>
-        <p:spPr>
-          <a:xfrm>
-            <a:off x="6223864" y="4169664"/>
-            <a:ext cx="5327752" cy="2084832"/>
-          </a:xfrm>
-          <a:prstGeom prst="roundRect">
-            <a:avLst>
-              <a:gd name="adj" fmla="val 4386"/>
-            </a:avLst>
-          </a:prstGeom>
-          <a:solidFill>
-            <a:srgbClr val="161D29"/>
+            <a:endParaRPr lang="en-US" sz="1250" dirty="0"/>
+          </a:p>
+        </p:txBody>
+      </p:sp>
+      <p:sp>
+        <p:nvSpPr>
+          <p:cNvPr id="22" name="Shape 20"/>
+          <p:cNvSpPr/>
+          <p:nvPr/>
+        </p:nvSpPr>
+        <p:spPr>
+          <a:xfrm>
+            <a:off x="6233008" y="4297680"/>
+            <a:ext cx="5501488" cy="1737360"/>
+          </a:xfrm>
+          <a:prstGeom prst="rect">
+            <a:avLst/>
+          </a:prstGeom>
+          <a:solidFill>
+            <a:srgbClr val="FFFFFF"/>
           </a:solidFill>
           <a:ln w="12700">
             <a:solidFill>
-              <a:srgbClr val="26303F"/>
+              <a:srgbClr val="E5E7EB"/>
             </a:solidFill>
             <a:prstDash val="solid"/>
           </a:ln>
           <a:effectLst>
-            <a:outerShdw sx="100000" sy="100000" kx="0" ky="0" algn="bl" rotWithShape="0" blurRad="127000" dist="50800" dir="5400000">
+            <a:outerShdw sx="100000" sy="100000" kx="0" ky="0" algn="bl" rotWithShape="0" blurRad="76200" dist="50800" dir="5400000">
               <a:srgbClr val="000000">
-                <a:alpha val="45000"/>
+                <a:alpha val="8000"/>
               </a:srgbClr>
             </a:outerShdw>
           </a:effectLst>
@@ -3088,75 +3493,98 @@
       </p:sp>
       <p:sp>
         <p:nvSpPr>
-          <p:cNvPr id="17" name="Text 15"/>
-          <p:cNvSpPr/>
-          <p:nvPr/>
-        </p:nvSpPr>
-        <p:spPr>
-          <a:xfrm>
-            <a:off x="6543904" y="4462272"/>
-            <a:ext cx="868680" cy="640080"/>
-          </a:xfrm>
-          <a:prstGeom prst="rect">
-            <a:avLst/>
-          </a:prstGeom>
-          <a:noFill/>
-          <a:ln/>
-        </p:spPr>
-        <p:txBody>
-          <a:bodyPr wrap="square" lIns="0" tIns="0" rIns="0" bIns="0" rtlCol="0" anchor="ctr"/>
-          <a:lstStyle/>
-          <a:p>
-            <a:pPr indent="0" marL="0">
-              <a:buNone/>
-            </a:pPr>
-            <a:r>
-              <a:rPr lang="en-US" sz="3000" b="1" dirty="0">
-                <a:solidFill>
-                  <a:srgbClr val="10B981"/>
-                </a:solidFill>
-                <a:latin typeface="Calibri" pitchFamily="34" charset="0"/>
-                <a:ea typeface="Calibri" pitchFamily="34" charset="-122"/>
-                <a:cs typeface="Calibri" pitchFamily="34" charset="-120"/>
+          <p:cNvPr id="23" name="Shape 21"/>
+          <p:cNvSpPr/>
+          <p:nvPr/>
+        </p:nvSpPr>
+        <p:spPr>
+          <a:xfrm>
+            <a:off x="6507328" y="4572000"/>
+            <a:ext cx="640080" cy="640080"/>
+          </a:xfrm>
+          <a:prstGeom prst="rect">
+            <a:avLst/>
+          </a:prstGeom>
+          <a:solidFill>
+            <a:srgbClr val="1456F0"/>
+          </a:solidFill>
+          <a:ln/>
+        </p:spPr>
+      </p:sp>
+      <p:sp>
+        <p:nvSpPr>
+          <p:cNvPr id="24" name="Text 22"/>
+          <p:cNvSpPr/>
+          <p:nvPr/>
+        </p:nvSpPr>
+        <p:spPr>
+          <a:xfrm>
+            <a:off x="6507328" y="4572000"/>
+            <a:ext cx="640080" cy="640080"/>
+          </a:xfrm>
+          <a:prstGeom prst="rect">
+            <a:avLst/>
+          </a:prstGeom>
+          <a:noFill/>
+          <a:ln/>
+        </p:spPr>
+        <p:txBody>
+          <a:bodyPr wrap="square" lIns="0" tIns="0" rIns="0" bIns="0" rtlCol="0" anchor="ctr"/>
+          <a:lstStyle/>
+          <a:p>
+            <a:pPr algn="ctr" indent="0" marL="0">
+              <a:buNone/>
+            </a:pPr>
+            <a:r>
+              <a:rPr lang="en-US" sz="1800" b="1" dirty="0">
+                <a:solidFill>
+                  <a:srgbClr val="FFFFFF"/>
+                </a:solidFill>
+                <a:latin typeface="Pretendard" pitchFamily="34" charset="0"/>
+                <a:ea typeface="Pretendard" pitchFamily="34" charset="-122"/>
+                <a:cs typeface="Pretendard" pitchFamily="34" charset="-120"/>
               </a:rPr>
               <a:t>04</a:t>
             </a:r>
-            <a:endParaRPr lang="en-US" sz="3000" dirty="0"/>
-          </a:p>
-        </p:txBody>
-      </p:sp>
-      <p:sp>
-        <p:nvSpPr>
-          <p:cNvPr id="18" name="Text 16"/>
-          <p:cNvSpPr/>
-          <p:nvPr/>
-        </p:nvSpPr>
-        <p:spPr>
-          <a:xfrm>
-            <a:off x="7458304" y="4480560"/>
-            <a:ext cx="3773272" cy="731520"/>
-          </a:xfrm>
-          <a:prstGeom prst="rect">
-            <a:avLst/>
-          </a:prstGeom>
-          <a:noFill/>
-          <a:ln/>
-        </p:spPr>
-        <p:txBody>
-          <a:bodyPr wrap="square" lIns="0" tIns="0" rIns="0" bIns="0" rtlCol="0" anchor="ctr"/>
-          <a:lstStyle/>
-          <a:p>
-            <a:pPr indent="0" marL="0">
+            <a:endParaRPr lang="en-US" sz="1800" dirty="0"/>
+          </a:p>
+        </p:txBody>
+      </p:sp>
+      <p:sp>
+        <p:nvSpPr>
+          <p:cNvPr id="25" name="Text 23"/>
+          <p:cNvSpPr/>
+          <p:nvPr/>
+        </p:nvSpPr>
+        <p:spPr>
+          <a:xfrm>
+            <a:off x="7330288" y="4572000"/>
+            <a:ext cx="4129888" cy="640080"/>
+          </a:xfrm>
+          <a:prstGeom prst="rect">
+            <a:avLst/>
+          </a:prstGeom>
+          <a:noFill/>
+          <a:ln/>
+        </p:spPr>
+        <p:txBody>
+          <a:bodyPr wrap="square" lIns="0" tIns="0" rIns="0" bIns="0" rtlCol="0" anchor="ctr"/>
+          <a:lstStyle/>
+          <a:p>
+            <a:pPr indent="0" marL="0">
+              <a:lnSpc>
+                <a:spcPct val="115000"/>
+              </a:lnSpc>
               <a:buNone/>
             </a:pPr>
             <a:r>
               <a:rPr lang="en-US" sz="1700" b="1" dirty="0">
                 <a:solidFill>
-                  <a:srgbClr val="FFFFFF"/>
-                </a:solidFill>
-                <a:latin typeface="Calibri" pitchFamily="34" charset="0"/>
-                <a:ea typeface="Calibri" pitchFamily="34" charset="-122"/>
-                <a:cs typeface="Calibri" pitchFamily="34" charset="-120"/>
+                  <a:srgbClr val="222222"/>
+                </a:solidFill>
+                <a:latin typeface="Pretendard" pitchFamily="34" charset="0"/>
+                <a:ea typeface="Pretendard" pitchFamily="34" charset="-122"/>
+                <a:cs typeface="Pretendard" pitchFamily="34" charset="-120"/>
               </a:rPr>
               <a:t>재현 가능한 배포</a:t>
             </a:r>
@@ -3166,14 +3594,14 @@
       </p:sp>
       <p:sp>
         <p:nvSpPr>
-          <p:cNvPr id="19" name="Text 17"/>
-          <p:cNvSpPr/>
-          <p:nvPr/>
-        </p:nvSpPr>
-        <p:spPr>
-          <a:xfrm>
-            <a:off x="6571336" y="5248656"/>
-            <a:ext cx="4641952" cy="868680"/>
+          <p:cNvPr id="26" name="Text 24"/>
+          <p:cNvSpPr/>
+          <p:nvPr/>
+        </p:nvSpPr>
+        <p:spPr>
+          <a:xfrm>
+            <a:off x="6507328" y="5321808"/>
+            <a:ext cx="4952848" cy="621792"/>
           </a:xfrm>
           <a:prstGeom prst="rect">
             <a:avLst/>
@@ -3187,22 +3615,22 @@
           <a:p>
             <a:pPr indent="0" marL="0">
               <a:lnSpc>
-                <a:spcPct val="122000"/>
+                <a:spcPct val="140000"/>
               </a:lnSpc>
               <a:buNone/>
             </a:pPr>
             <a:r>
-              <a:rPr lang="en-US" sz="1300" dirty="0">
-                <a:solidFill>
-                  <a:srgbClr val="9CA3AF"/>
-                </a:solidFill>
-                <a:latin typeface="Calibri" pitchFamily="34" charset="0"/>
-                <a:ea typeface="Calibri" pitchFamily="34" charset="-122"/>
-                <a:cs typeface="Calibri" pitchFamily="34" charset="-120"/>
+              <a:rPr lang="en-US" sz="1250" dirty="0">
+                <a:solidFill>
+                  <a:srgbClr val="45515E"/>
+                </a:solidFill>
+                <a:latin typeface="Pretendard" pitchFamily="34" charset="0"/>
+                <a:ea typeface="Pretendard" pitchFamily="34" charset="-122"/>
+                <a:cs typeface="Pretendard" pitchFamily="34" charset="-120"/>
               </a:rPr>
               <a:t>output: standalone + Docker 컨테이너화로 프론트·백엔드를 어디서나 동일하게 실행.</a:t>
             </a:r>
-            <a:endParaRPr lang="en-US" sz="1300" dirty="0"/>
+            <a:endParaRPr lang="en-US" sz="1250" dirty="0"/>
           </a:p>
         </p:txBody>
       </p:sp>
